--- a/public/downloads/praesentation/M02.pptx
+++ b/public/downloads/praesentation/M02.pptx
@@ -16,6 +16,10 @@
     <p:sldId id="264" r:id="rId15"/>
     <p:sldId id="265" r:id="rId16"/>
     <p:sldId id="266" r:id="rId17"/>
+    <p:sldId id="267" r:id="rId18"/>
+    <p:sldId id="268" r:id="rId19"/>
+    <p:sldId id="269" r:id="rId20"/>
+    <p:sldId id="270" r:id="rId21"/>
   </p:sldIdLst>
   <p:sldSz cx="12188952" cy="6858000" type="screen4x3"/>
   <p:notesSz cx="6858000" cy="9144000"/>
@@ -3157,8 +3161,8 @@
         </p:nvSpPr>
         <p:spPr>
           <a:xfrm>
-            <a:off x="365760" y="365760"/>
-            <a:ext cx="11430000" cy="457200"/>
+            <a:off x="365760" y="320040"/>
+            <a:ext cx="11430000" cy="411480"/>
           </a:xfrm>
           <a:prstGeom prst="rect">
             <a:avLst/>
@@ -3173,13 +3177,13 @@
           <a:p>
             <a:pPr algn="l"/>
             <a:r>
-              <a:rPr sz="1100" b="0">
-                <a:solidFill>
-                  <a:srgbClr val="FFFFFF"/>
-                </a:solidFill>
-                <a:latin typeface="Arial"/>
-              </a:rPr>
-              <a:t>M02  ·  K-01 Finanzanalyse &amp; Kreditexpertise  ·  Sparring  ·  180 Min.</a:t>
+              <a:rPr sz="1100" b="0" i="0">
+                <a:solidFill>
+                  <a:srgbClr val="BBCCEE"/>
+                </a:solidFill>
+                <a:latin typeface="Arial"/>
+              </a:rPr>
+              <a:t>M02  ·  K-01 Finanzanalyse &amp; Kreditexpertise  ·  Zielstufe: Sparring  ·  180 Min.</a:t>
             </a:r>
           </a:p>
         </p:txBody>
@@ -3192,14 +3196,14 @@
         </p:nvSpPr>
         <p:spPr>
           <a:xfrm>
-            <a:off x="365760" y="868680"/>
-            <a:ext cx="7315200" cy="27432"/>
+            <a:off x="365760" y="804672"/>
+            <a:ext cx="8229600" cy="22860"/>
           </a:xfrm>
           <a:prstGeom prst="rect">
             <a:avLst/>
           </a:prstGeom>
           <a:solidFill>
-            <a:srgbClr val="FFFFFF"/>
+            <a:srgbClr val="335CC0"/>
           </a:solidFill>
           <a:ln>
             <a:noFill/>
@@ -3235,8 +3239,8 @@
         </p:nvSpPr>
         <p:spPr>
           <a:xfrm>
-            <a:off x="365760" y="1097280"/>
-            <a:ext cx="11430000" cy="2286000"/>
+            <a:off x="365760" y="1005840"/>
+            <a:ext cx="11430000" cy="2560320"/>
           </a:xfrm>
           <a:prstGeom prst="rect">
             <a:avLst/>
@@ -3251,7 +3255,7 @@
           <a:p>
             <a:pPr algn="l"/>
             <a:r>
-              <a:rPr sz="4000" b="1">
+              <a:rPr sz="4200" b="1" i="0">
                 <a:solidFill>
                   <a:srgbClr val="FFFFFF"/>
                 </a:solidFill>
@@ -3270,8 +3274,8 @@
         </p:nvSpPr>
         <p:spPr>
           <a:xfrm>
-            <a:off x="365760" y="3200400"/>
-            <a:ext cx="9144000" cy="914400"/>
+            <a:off x="365760" y="3383280"/>
+            <a:ext cx="10058400" cy="822960"/>
           </a:xfrm>
           <a:prstGeom prst="rect">
             <a:avLst/>
@@ -3286,7 +3290,7 @@
           <a:p>
             <a:pPr algn="l"/>
             <a:r>
-              <a:rPr sz="2000" b="0">
+              <a:rPr sz="2000" b="0" i="1">
                 <a:solidFill>
                   <a:srgbClr val="CCD6F0"/>
                 </a:solidFill>
@@ -3305,8 +3309,8 @@
         </p:nvSpPr>
         <p:spPr>
           <a:xfrm>
-            <a:off x="365760" y="6217920"/>
-            <a:ext cx="11430000" cy="457200"/>
+            <a:off x="365760" y="6309360"/>
+            <a:ext cx="11430000" cy="365760"/>
           </a:xfrm>
           <a:prstGeom prst="rect">
             <a:avLst/>
@@ -3321,9 +3325,9 @@
           <a:p>
             <a:pPr algn="l"/>
             <a:r>
-              <a:rPr sz="1000" b="0">
-                <a:solidFill>
-                  <a:srgbClr val="99AACC"/>
+              <a:rPr sz="900" b="0" i="0">
+                <a:solidFill>
+                  <a:srgbClr val="889ACC"/>
                 </a:solidFill>
                 <a:latin typeface="Arial"/>
               </a:rPr>
@@ -3341,6 +3345,691 @@
 </file>
 
 <file path=ppt/slides/slide10.xml><?xml version="1.0" encoding="utf-8"?>
+<p:sld xmlns:a="http://schemas.openxmlformats.org/drawingml/2006/main" xmlns:p="http://schemas.openxmlformats.org/presentationml/2006/main" xmlns:r="http://schemas.openxmlformats.org/officeDocument/2006/relationships">
+  <p:cSld>
+    <p:bg>
+      <p:bgPr>
+        <a:solidFill>
+          <a:srgbClr val="FFFFFF"/>
+        </a:solidFill>
+        <a:effectLst/>
+      </p:bgPr>
+    </p:bg>
+    <p:spTree>
+      <p:nvGrpSpPr>
+        <p:cNvPr id="1" name=""/>
+        <p:cNvGrpSpPr/>
+        <p:nvPr/>
+      </p:nvGrpSpPr>
+      <p:grpSpPr/>
+      <p:sp>
+        <p:nvSpPr>
+          <p:cNvPr id="2" name="Rectangle 1"/>
+          <p:cNvSpPr/>
+          <p:nvPr/>
+        </p:nvSpPr>
+        <p:spPr>
+          <a:xfrm>
+            <a:off x="0" y="0"/>
+            <a:ext cx="73152" cy="6858000"/>
+          </a:xfrm>
+          <a:prstGeom prst="rect">
+            <a:avLst/>
+          </a:prstGeom>
+          <a:solidFill>
+            <a:srgbClr val="003DA5"/>
+          </a:solidFill>
+          <a:ln>
+            <a:noFill/>
+          </a:ln>
+        </p:spPr>
+        <p:style>
+          <a:lnRef idx="1">
+            <a:schemeClr val="accent1"/>
+          </a:lnRef>
+          <a:fillRef idx="3">
+            <a:schemeClr val="accent1"/>
+          </a:fillRef>
+          <a:effectRef idx="2">
+            <a:schemeClr val="accent1"/>
+          </a:effectRef>
+          <a:fontRef idx="minor">
+            <a:schemeClr val="lt1"/>
+          </a:fontRef>
+        </p:style>
+        <p:txBody>
+          <a:bodyPr rtlCol="0" anchor="ctr"/>
+          <a:lstStyle/>
+          <a:p>
+            <a:pPr algn="ctr"/>
+          </a:p>
+        </p:txBody>
+      </p:sp>
+      <p:sp>
+        <p:nvSpPr>
+          <p:cNvPr id="3" name="TextBox 2"/>
+          <p:cNvSpPr txBox="1"/>
+          <p:nvPr/>
+        </p:nvSpPr>
+        <p:spPr>
+          <a:xfrm>
+            <a:off x="228600" y="182880"/>
+            <a:ext cx="11430000" cy="320040"/>
+          </a:xfrm>
+          <a:prstGeom prst="rect">
+            <a:avLst/>
+          </a:prstGeom>
+          <a:noFill/>
+        </p:spPr>
+        <p:txBody>
+          <a:bodyPr wrap="square">
+            <a:spAutoFit/>
+          </a:bodyPr>
+          <a:lstStyle/>
+          <a:p>
+            <a:pPr algn="l"/>
+            <a:r>
+              <a:rPr sz="900" b="0" i="0">
+                <a:solidFill>
+                  <a:srgbClr val="556575"/>
+                </a:solidFill>
+                <a:latin typeface="Arial"/>
+              </a:rPr>
+              <a:t>M02 · Modulinhalte</a:t>
+            </a:r>
+          </a:p>
+        </p:txBody>
+      </p:sp>
+      <p:sp>
+        <p:nvSpPr>
+          <p:cNvPr id="4" name="TextBox 3"/>
+          <p:cNvSpPr txBox="1"/>
+          <p:nvPr/>
+        </p:nvSpPr>
+        <p:spPr>
+          <a:xfrm>
+            <a:off x="365760" y="274320"/>
+            <a:ext cx="11430000" cy="777240"/>
+          </a:xfrm>
+          <a:prstGeom prst="rect">
+            <a:avLst/>
+          </a:prstGeom>
+          <a:noFill/>
+        </p:spPr>
+        <p:txBody>
+          <a:bodyPr wrap="square">
+            <a:spAutoFit/>
+          </a:bodyPr>
+          <a:lstStyle/>
+          <a:p>
+            <a:pPr algn="l"/>
+            <a:r>
+              <a:rPr sz="2200" b="1" i="0">
+                <a:solidFill>
+                  <a:srgbClr val="003DA5"/>
+                </a:solidFill>
+                <a:latin typeface="Arial"/>
+              </a:rPr>
+              <a:t>Beobachtungsbogen Rollenspiel</a:t>
+            </a:r>
+          </a:p>
+        </p:txBody>
+      </p:sp>
+      <p:sp>
+        <p:nvSpPr>
+          <p:cNvPr id="5" name="Rectangle 4"/>
+          <p:cNvSpPr/>
+          <p:nvPr/>
+        </p:nvSpPr>
+        <p:spPr>
+          <a:xfrm>
+            <a:off x="365760" y="1005840"/>
+            <a:ext cx="11430000" cy="27432"/>
+          </a:xfrm>
+          <a:prstGeom prst="rect">
+            <a:avLst/>
+          </a:prstGeom>
+          <a:solidFill>
+            <a:srgbClr val="D1D5DB"/>
+          </a:solidFill>
+          <a:ln>
+            <a:noFill/>
+          </a:ln>
+        </p:spPr>
+        <p:style>
+          <a:lnRef idx="1">
+            <a:schemeClr val="accent1"/>
+          </a:lnRef>
+          <a:fillRef idx="3">
+            <a:schemeClr val="accent1"/>
+          </a:fillRef>
+          <a:effectRef idx="2">
+            <a:schemeClr val="accent1"/>
+          </a:effectRef>
+          <a:fontRef idx="minor">
+            <a:schemeClr val="lt1"/>
+          </a:fontRef>
+        </p:style>
+        <p:txBody>
+          <a:bodyPr rtlCol="0" anchor="ctr"/>
+          <a:lstStyle/>
+          <a:p>
+            <a:pPr algn="ctr"/>
+          </a:p>
+        </p:txBody>
+      </p:sp>
+      <p:graphicFrame>
+        <p:nvGraphicFramePr>
+          <p:cNvPr id="6" name="Table 5"/>
+          <p:cNvGraphicFramePr>
+            <a:graphicFrameLocks noGrp="1"/>
+          </p:cNvGraphicFramePr>
+          <p:nvPr/>
+        </p:nvGraphicFramePr>
+        <p:xfrm>
+          <a:off x="365760" y="1143000"/>
+          <a:ext cx="11430000" cy="3328416"/>
+        </p:xfrm>
+        <a:graphic>
+          <a:graphicData uri="http://schemas.openxmlformats.org/drawingml/2006/table">
+            <a:tbl>
+              <a:tblPr firstRow="1" bandRow="1">
+                <a:tableStyleId>{5C22544A-7EE6-4342-B048-85BDC9FD1C3A}</a:tableStyleId>
+              </a:tblPr>
+              <a:tblGrid>
+                <a:gridCol w="3810000"/>
+                <a:gridCol w="3810000"/>
+                <a:gridCol w="3810000"/>
+              </a:tblGrid>
+              <a:tr h="475488">
+                <a:tc>
+                  <a:txBody>
+                    <a:bodyPr wrap="square"/>
+                    <a:lstStyle/>
+                    <a:p>
+                      <a:r>
+                        <a:rPr sz="1100" b="1">
+                          <a:solidFill>
+                            <a:srgbClr val="FFFFFF"/>
+                          </a:solidFill>
+                          <a:latin typeface="Arial"/>
+                        </a:rPr>
+                        <a:t>Kriterium</a:t>
+                      </a:r>
+                    </a:p>
+                  </a:txBody>
+                  <a:tcPr>
+                    <a:solidFill>
+                      <a:srgbClr val="003DA5"/>
+                    </a:solidFill>
+                  </a:tcPr>
+                </a:tc>
+                <a:tc>
+                  <a:txBody>
+                    <a:bodyPr wrap="square"/>
+                    <a:lstStyle/>
+                    <a:p>
+                      <a:r>
+                        <a:rPr sz="1100" b="1">
+                          <a:solidFill>
+                            <a:srgbClr val="FFFFFF"/>
+                          </a:solidFill>
+                          <a:latin typeface="Arial"/>
+                        </a:rPr>
+                        <a:t>Beobachtung / Beispiel</a:t>
+                      </a:r>
+                    </a:p>
+                  </a:txBody>
+                  <a:tcPr>
+                    <a:solidFill>
+                      <a:srgbClr val="003DA5"/>
+                    </a:solidFill>
+                  </a:tcPr>
+                </a:tc>
+                <a:tc>
+                  <a:txBody>
+                    <a:bodyPr wrap="square"/>
+                    <a:lstStyle/>
+                    <a:p>
+                      <a:r>
+                        <a:rPr sz="1100" b="1">
+                          <a:solidFill>
+                            <a:srgbClr val="FFFFFF"/>
+                          </a:solidFill>
+                          <a:latin typeface="Arial"/>
+                        </a:rPr>
+                        <a:t>1–5</a:t>
+                      </a:r>
+                    </a:p>
+                  </a:txBody>
+                  <a:tcPr>
+                    <a:solidFill>
+                      <a:srgbClr val="003DA5"/>
+                    </a:solidFill>
+                  </a:tcPr>
+                </a:tc>
+              </a:tr>
+              <a:tr h="475488">
+                <a:tc>
+                  <a:txBody>
+                    <a:bodyPr wrap="square"/>
+                    <a:lstStyle/>
+                    <a:p>
+                      <a:r>
+                        <a:rPr sz="1100" b="0">
+                          <a:solidFill>
+                            <a:srgbClr val="1A1A1A"/>
+                          </a:solidFill>
+                          <a:latin typeface="Arial"/>
+                        </a:rPr>
+                        <a:t>5-Phasen-Rahmen eingehalten</a:t>
+                      </a:r>
+                    </a:p>
+                  </a:txBody>
+                  <a:tcPr>
+                    <a:solidFill>
+                      <a:srgbClr val="FFFFFF"/>
+                    </a:solidFill>
+                  </a:tcPr>
+                </a:tc>
+                <a:tc>
+                  <a:txBody>
+                    <a:bodyPr wrap="square"/>
+                    <a:lstStyle/>
+                    <a:p>
+                      <a:r>
+                        <a:rPr sz="1100" b="0">
+                          <a:solidFill>
+                            <a:srgbClr val="1A1A1A"/>
+                          </a:solidFill>
+                          <a:latin typeface="Arial"/>
+                        </a:rPr>
+                        <a:t/>
+                      </a:r>
+                    </a:p>
+                  </a:txBody>
+                  <a:tcPr>
+                    <a:solidFill>
+                      <a:srgbClr val="FFFFFF"/>
+                    </a:solidFill>
+                  </a:tcPr>
+                </a:tc>
+                <a:tc>
+                  <a:txBody>
+                    <a:bodyPr wrap="square"/>
+                    <a:lstStyle/>
+                    <a:p>
+                      <a:r>
+                        <a:rPr sz="1100" b="0">
+                          <a:solidFill>
+                            <a:srgbClr val="1A1A1A"/>
+                          </a:solidFill>
+                          <a:latin typeface="Arial"/>
+                        </a:rPr>
+                        <a:t/>
+                      </a:r>
+                    </a:p>
+                  </a:txBody>
+                  <a:tcPr>
+                    <a:solidFill>
+                      <a:srgbClr val="FFFFFF"/>
+                    </a:solidFill>
+                  </a:tcPr>
+                </a:tc>
+              </a:tr>
+              <a:tr h="475488">
+                <a:tc>
+                  <a:txBody>
+                    <a:bodyPr wrap="square"/>
+                    <a:lstStyle/>
+                    <a:p>
+                      <a:r>
+                        <a:rPr sz="1100" b="0">
+                          <a:solidFill>
+                            <a:srgbClr val="1A1A1A"/>
+                          </a:solidFill>
+                          <a:latin typeface="Arial"/>
+                        </a:rPr>
+                        <a:t>Offene Fragen eingesetzt</a:t>
+                      </a:r>
+                    </a:p>
+                  </a:txBody>
+                  <a:tcPr>
+                    <a:solidFill>
+                      <a:srgbClr val="F4F6FA"/>
+                    </a:solidFill>
+                  </a:tcPr>
+                </a:tc>
+                <a:tc>
+                  <a:txBody>
+                    <a:bodyPr wrap="square"/>
+                    <a:lstStyle/>
+                    <a:p>
+                      <a:r>
+                        <a:rPr sz="1100" b="0">
+                          <a:solidFill>
+                            <a:srgbClr val="1A1A1A"/>
+                          </a:solidFill>
+                          <a:latin typeface="Arial"/>
+                        </a:rPr>
+                        <a:t/>
+                      </a:r>
+                    </a:p>
+                  </a:txBody>
+                  <a:tcPr>
+                    <a:solidFill>
+                      <a:srgbClr val="F4F6FA"/>
+                    </a:solidFill>
+                  </a:tcPr>
+                </a:tc>
+                <a:tc>
+                  <a:txBody>
+                    <a:bodyPr wrap="square"/>
+                    <a:lstStyle/>
+                    <a:p>
+                      <a:r>
+                        <a:rPr sz="1100" b="0">
+                          <a:solidFill>
+                            <a:srgbClr val="1A1A1A"/>
+                          </a:solidFill>
+                          <a:latin typeface="Arial"/>
+                        </a:rPr>
+                        <a:t/>
+                      </a:r>
+                    </a:p>
+                  </a:txBody>
+                  <a:tcPr>
+                    <a:solidFill>
+                      <a:srgbClr val="F4F6FA"/>
+                    </a:solidFill>
+                  </a:tcPr>
+                </a:tc>
+              </a:tr>
+              <a:tr h="475488">
+                <a:tc>
+                  <a:txBody>
+                    <a:bodyPr wrap="square"/>
+                    <a:lstStyle/>
+                    <a:p>
+                      <a:r>
+                        <a:rPr sz="1100" b="0">
+                          <a:solidFill>
+                            <a:srgbClr val="1A1A1A"/>
+                          </a:solidFill>
+                          <a:latin typeface="Arial"/>
+                        </a:rPr>
+                        <a:t>Beobachtung + Frage statt Beobachtung + Urteil</a:t>
+                      </a:r>
+                    </a:p>
+                  </a:txBody>
+                  <a:tcPr>
+                    <a:solidFill>
+                      <a:srgbClr val="FFFFFF"/>
+                    </a:solidFill>
+                  </a:tcPr>
+                </a:tc>
+                <a:tc>
+                  <a:txBody>
+                    <a:bodyPr wrap="square"/>
+                    <a:lstStyle/>
+                    <a:p>
+                      <a:r>
+                        <a:rPr sz="1100" b="0">
+                          <a:solidFill>
+                            <a:srgbClr val="1A1A1A"/>
+                          </a:solidFill>
+                          <a:latin typeface="Arial"/>
+                        </a:rPr>
+                        <a:t/>
+                      </a:r>
+                    </a:p>
+                  </a:txBody>
+                  <a:tcPr>
+                    <a:solidFill>
+                      <a:srgbClr val="FFFFFF"/>
+                    </a:solidFill>
+                  </a:tcPr>
+                </a:tc>
+                <a:tc>
+                  <a:txBody>
+                    <a:bodyPr wrap="square"/>
+                    <a:lstStyle/>
+                    <a:p>
+                      <a:r>
+                        <a:rPr sz="1100" b="0">
+                          <a:solidFill>
+                            <a:srgbClr val="1A1A1A"/>
+                          </a:solidFill>
+                          <a:latin typeface="Arial"/>
+                        </a:rPr>
+                        <a:t/>
+                      </a:r>
+                    </a:p>
+                  </a:txBody>
+                  <a:tcPr>
+                    <a:solidFill>
+                      <a:srgbClr val="FFFFFF"/>
+                    </a:solidFill>
+                  </a:tcPr>
+                </a:tc>
+              </a:tr>
+              <a:tr h="475488">
+                <a:tc>
+                  <a:txBody>
+                    <a:bodyPr wrap="square"/>
+                    <a:lstStyle/>
+                    <a:p>
+                      <a:r>
+                        <a:rPr sz="1100" b="0">
+                          <a:solidFill>
+                            <a:srgbClr val="1A1A1A"/>
+                          </a:solidFill>
+                          <a:latin typeface="Arial"/>
+                        </a:rPr>
+                        <a:t>Qualitative Info aktiv erfragt</a:t>
+                      </a:r>
+                    </a:p>
+                  </a:txBody>
+                  <a:tcPr>
+                    <a:solidFill>
+                      <a:srgbClr val="F4F6FA"/>
+                    </a:solidFill>
+                  </a:tcPr>
+                </a:tc>
+                <a:tc>
+                  <a:txBody>
+                    <a:bodyPr wrap="square"/>
+                    <a:lstStyle/>
+                    <a:p>
+                      <a:r>
+                        <a:rPr sz="1100" b="0">
+                          <a:solidFill>
+                            <a:srgbClr val="1A1A1A"/>
+                          </a:solidFill>
+                          <a:latin typeface="Arial"/>
+                        </a:rPr>
+                        <a:t/>
+                      </a:r>
+                    </a:p>
+                  </a:txBody>
+                  <a:tcPr>
+                    <a:solidFill>
+                      <a:srgbClr val="F4F6FA"/>
+                    </a:solidFill>
+                  </a:tcPr>
+                </a:tc>
+                <a:tc>
+                  <a:txBody>
+                    <a:bodyPr wrap="square"/>
+                    <a:lstStyle/>
+                    <a:p>
+                      <a:r>
+                        <a:rPr sz="1100" b="0">
+                          <a:solidFill>
+                            <a:srgbClr val="1A1A1A"/>
+                          </a:solidFill>
+                          <a:latin typeface="Arial"/>
+                        </a:rPr>
+                        <a:t/>
+                      </a:r>
+                    </a:p>
+                  </a:txBody>
+                  <a:tcPr>
+                    <a:solidFill>
+                      <a:srgbClr val="F4F6FA"/>
+                    </a:solidFill>
+                  </a:tcPr>
+                </a:tc>
+              </a:tr>
+              <a:tr h="475488">
+                <a:tc>
+                  <a:txBody>
+                    <a:bodyPr wrap="square"/>
+                    <a:lstStyle/>
+                    <a:p>
+                      <a:r>
+                        <a:rPr sz="1100" b="0">
+                          <a:solidFill>
+                            <a:srgbClr val="1A1A1A"/>
+                          </a:solidFill>
+                          <a:latin typeface="Arial"/>
+                        </a:rPr>
+                        <a:t>Konkrete Beratungsimpulse aus Analyse abgeleitet</a:t>
+                      </a:r>
+                    </a:p>
+                  </a:txBody>
+                  <a:tcPr>
+                    <a:solidFill>
+                      <a:srgbClr val="FFFFFF"/>
+                    </a:solidFill>
+                  </a:tcPr>
+                </a:tc>
+                <a:tc>
+                  <a:txBody>
+                    <a:bodyPr wrap="square"/>
+                    <a:lstStyle/>
+                    <a:p>
+                      <a:r>
+                        <a:rPr sz="1100" b="0">
+                          <a:solidFill>
+                            <a:srgbClr val="1A1A1A"/>
+                          </a:solidFill>
+                          <a:latin typeface="Arial"/>
+                        </a:rPr>
+                        <a:t/>
+                      </a:r>
+                    </a:p>
+                  </a:txBody>
+                  <a:tcPr>
+                    <a:solidFill>
+                      <a:srgbClr val="FFFFFF"/>
+                    </a:solidFill>
+                  </a:tcPr>
+                </a:tc>
+                <a:tc>
+                  <a:txBody>
+                    <a:bodyPr wrap="square"/>
+                    <a:lstStyle/>
+                    <a:p>
+                      <a:r>
+                        <a:rPr sz="1100" b="0">
+                          <a:solidFill>
+                            <a:srgbClr val="1A1A1A"/>
+                          </a:solidFill>
+                          <a:latin typeface="Arial"/>
+                        </a:rPr>
+                        <a:t/>
+                      </a:r>
+                    </a:p>
+                  </a:txBody>
+                  <a:tcPr>
+                    <a:solidFill>
+                      <a:srgbClr val="FFFFFF"/>
+                    </a:solidFill>
+                  </a:tcPr>
+                </a:tc>
+              </a:tr>
+              <a:tr h="475488">
+                <a:tc>
+                  <a:txBody>
+                    <a:bodyPr wrap="square"/>
+                    <a:lstStyle/>
+                    <a:p>
+                      <a:r>
+                        <a:rPr sz="1100" b="0">
+                          <a:solidFill>
+                            <a:srgbClr val="1A1A1A"/>
+                          </a:solidFill>
+                          <a:latin typeface="Arial"/>
+                        </a:rPr>
+                        <a:t>Gespräch wirkte wie Dialog auf Augenhöhe</a:t>
+                      </a:r>
+                    </a:p>
+                  </a:txBody>
+                  <a:tcPr>
+                    <a:solidFill>
+                      <a:srgbClr val="F4F6FA"/>
+                    </a:solidFill>
+                  </a:tcPr>
+                </a:tc>
+                <a:tc>
+                  <a:txBody>
+                    <a:bodyPr wrap="square"/>
+                    <a:lstStyle/>
+                    <a:p>
+                      <a:r>
+                        <a:rPr sz="1100" b="0">
+                          <a:solidFill>
+                            <a:srgbClr val="1A1A1A"/>
+                          </a:solidFill>
+                          <a:latin typeface="Arial"/>
+                        </a:rPr>
+                        <a:t/>
+                      </a:r>
+                    </a:p>
+                  </a:txBody>
+                  <a:tcPr>
+                    <a:solidFill>
+                      <a:srgbClr val="F4F6FA"/>
+                    </a:solidFill>
+                  </a:tcPr>
+                </a:tc>
+                <a:tc>
+                  <a:txBody>
+                    <a:bodyPr wrap="square"/>
+                    <a:lstStyle/>
+                    <a:p>
+                      <a:r>
+                        <a:rPr sz="1100" b="0">
+                          <a:solidFill>
+                            <a:srgbClr val="1A1A1A"/>
+                          </a:solidFill>
+                          <a:latin typeface="Arial"/>
+                        </a:rPr>
+                        <a:t/>
+                      </a:r>
+                    </a:p>
+                  </a:txBody>
+                  <a:tcPr>
+                    <a:solidFill>
+                      <a:srgbClr val="F4F6FA"/>
+                    </a:solidFill>
+                  </a:tcPr>
+                </a:tc>
+              </a:tr>
+            </a:tbl>
+          </a:graphicData>
+        </a:graphic>
+      </p:graphicFrame>
+    </p:spTree>
+  </p:cSld>
+  <p:clrMapOvr>
+    <a:masterClrMapping/>
+  </p:clrMapOvr>
+</p:sld>
+</file>
+
+<file path=ppt/slides/slide11.xml><?xml version="1.0" encoding="utf-8"?>
 <p:sld xmlns:a="http://schemas.openxmlformats.org/drawingml/2006/main" xmlns:p="http://schemas.openxmlformats.org/presentationml/2006/main" xmlns:r="http://schemas.openxmlformats.org/officeDocument/2006/relationships">
   <p:cSld>
     <p:bg>
@@ -3409,8 +4098,8 @@
         </p:nvSpPr>
         <p:spPr>
           <a:xfrm>
-            <a:off x="365760" y="2286000"/>
-            <a:ext cx="11430000" cy="1828800"/>
+            <a:off x="365760" y="2011680"/>
+            <a:ext cx="11430000" cy="2011680"/>
           </a:xfrm>
           <a:prstGeom prst="rect">
             <a:avLst/>
@@ -3425,13 +4114,13 @@
           <a:p>
             <a:pPr algn="l"/>
             <a:r>
-              <a:rPr sz="3600" b="1">
+              <a:rPr sz="3600" b="1" i="0">
                 <a:solidFill>
                   <a:srgbClr val="FFFFFF"/>
                 </a:solidFill>
                 <a:latin typeface="Arial"/>
               </a:rPr>
-              <a:t>Selbstcheck nach 4 Wochen</a:t>
+              <a:t>Checkliste: Bilanzgespräch vorbereiten</a:t>
             </a:r>
           </a:p>
         </p:txBody>
@@ -3444,7 +4133,1052 @@
 </p:sld>
 </file>
 
-<file path=ppt/slides/slide11.xml><?xml version="1.0" encoding="utf-8"?>
+<file path=ppt/slides/slide12.xml><?xml version="1.0" encoding="utf-8"?>
+<p:sld xmlns:a="http://schemas.openxmlformats.org/drawingml/2006/main" xmlns:p="http://schemas.openxmlformats.org/presentationml/2006/main" xmlns:r="http://schemas.openxmlformats.org/officeDocument/2006/relationships">
+  <p:cSld>
+    <p:bg>
+      <p:bgPr>
+        <a:solidFill>
+          <a:srgbClr val="FFFFFF"/>
+        </a:solidFill>
+        <a:effectLst/>
+      </p:bgPr>
+    </p:bg>
+    <p:spTree>
+      <p:nvGrpSpPr>
+        <p:cNvPr id="1" name=""/>
+        <p:cNvGrpSpPr/>
+        <p:nvPr/>
+      </p:nvGrpSpPr>
+      <p:grpSpPr/>
+      <p:sp>
+        <p:nvSpPr>
+          <p:cNvPr id="2" name="Rectangle 1"/>
+          <p:cNvSpPr/>
+          <p:nvPr/>
+        </p:nvSpPr>
+        <p:spPr>
+          <a:xfrm>
+            <a:off x="0" y="0"/>
+            <a:ext cx="73152" cy="6858000"/>
+          </a:xfrm>
+          <a:prstGeom prst="rect">
+            <a:avLst/>
+          </a:prstGeom>
+          <a:solidFill>
+            <a:srgbClr val="003DA5"/>
+          </a:solidFill>
+          <a:ln>
+            <a:noFill/>
+          </a:ln>
+        </p:spPr>
+        <p:style>
+          <a:lnRef idx="1">
+            <a:schemeClr val="accent1"/>
+          </a:lnRef>
+          <a:fillRef idx="3">
+            <a:schemeClr val="accent1"/>
+          </a:fillRef>
+          <a:effectRef idx="2">
+            <a:schemeClr val="accent1"/>
+          </a:effectRef>
+          <a:fontRef idx="minor">
+            <a:schemeClr val="lt1"/>
+          </a:fontRef>
+        </p:style>
+        <p:txBody>
+          <a:bodyPr rtlCol="0" anchor="ctr"/>
+          <a:lstStyle/>
+          <a:p>
+            <a:pPr algn="ctr"/>
+          </a:p>
+        </p:txBody>
+      </p:sp>
+      <p:sp>
+        <p:nvSpPr>
+          <p:cNvPr id="3" name="TextBox 2"/>
+          <p:cNvSpPr txBox="1"/>
+          <p:nvPr/>
+        </p:nvSpPr>
+        <p:spPr>
+          <a:xfrm>
+            <a:off x="228600" y="182880"/>
+            <a:ext cx="11430000" cy="320040"/>
+          </a:xfrm>
+          <a:prstGeom prst="rect">
+            <a:avLst/>
+          </a:prstGeom>
+          <a:noFill/>
+        </p:spPr>
+        <p:txBody>
+          <a:bodyPr wrap="square">
+            <a:spAutoFit/>
+          </a:bodyPr>
+          <a:lstStyle/>
+          <a:p>
+            <a:pPr algn="l"/>
+            <a:r>
+              <a:rPr sz="900" b="0" i="0">
+                <a:solidFill>
+                  <a:srgbClr val="556575"/>
+                </a:solidFill>
+                <a:latin typeface="Arial"/>
+              </a:rPr>
+              <a:t>M02 · Modulinhalte</a:t>
+            </a:r>
+          </a:p>
+        </p:txBody>
+      </p:sp>
+      <p:sp>
+        <p:nvSpPr>
+          <p:cNvPr id="4" name="TextBox 3"/>
+          <p:cNvSpPr txBox="1"/>
+          <p:nvPr/>
+        </p:nvSpPr>
+        <p:spPr>
+          <a:xfrm>
+            <a:off x="365760" y="274320"/>
+            <a:ext cx="11430000" cy="777240"/>
+          </a:xfrm>
+          <a:prstGeom prst="rect">
+            <a:avLst/>
+          </a:prstGeom>
+          <a:noFill/>
+        </p:spPr>
+        <p:txBody>
+          <a:bodyPr wrap="square">
+            <a:spAutoFit/>
+          </a:bodyPr>
+          <a:lstStyle/>
+          <a:p>
+            <a:pPr algn="l"/>
+            <a:r>
+              <a:rPr sz="2200" b="1" i="0">
+                <a:solidFill>
+                  <a:srgbClr val="003DA5"/>
+                </a:solidFill>
+                <a:latin typeface="Arial"/>
+              </a:rPr>
+              <a:t>Checkliste: Bilanzgespräch vorbereiten</a:t>
+            </a:r>
+          </a:p>
+        </p:txBody>
+      </p:sp>
+      <p:sp>
+        <p:nvSpPr>
+          <p:cNvPr id="5" name="Rectangle 4"/>
+          <p:cNvSpPr/>
+          <p:nvPr/>
+        </p:nvSpPr>
+        <p:spPr>
+          <a:xfrm>
+            <a:off x="365760" y="1005840"/>
+            <a:ext cx="11430000" cy="27432"/>
+          </a:xfrm>
+          <a:prstGeom prst="rect">
+            <a:avLst/>
+          </a:prstGeom>
+          <a:solidFill>
+            <a:srgbClr val="D1D5DB"/>
+          </a:solidFill>
+          <a:ln>
+            <a:noFill/>
+          </a:ln>
+        </p:spPr>
+        <p:style>
+          <a:lnRef idx="1">
+            <a:schemeClr val="accent1"/>
+          </a:lnRef>
+          <a:fillRef idx="3">
+            <a:schemeClr val="accent1"/>
+          </a:fillRef>
+          <a:effectRef idx="2">
+            <a:schemeClr val="accent1"/>
+          </a:effectRef>
+          <a:fontRef idx="minor">
+            <a:schemeClr val="lt1"/>
+          </a:fontRef>
+        </p:style>
+        <p:txBody>
+          <a:bodyPr rtlCol="0" anchor="ctr"/>
+          <a:lstStyle/>
+          <a:p>
+            <a:pPr algn="ctr"/>
+          </a:p>
+        </p:txBody>
+      </p:sp>
+      <p:sp>
+        <p:nvSpPr>
+          <p:cNvPr id="6" name="TextBox 5"/>
+          <p:cNvSpPr txBox="1"/>
+          <p:nvPr/>
+        </p:nvSpPr>
+        <p:spPr>
+          <a:xfrm>
+            <a:off x="365760" y="1143000"/>
+            <a:ext cx="11430000" cy="5212080"/>
+          </a:xfrm>
+          <a:prstGeom prst="rect">
+            <a:avLst/>
+          </a:prstGeom>
+          <a:noFill/>
+        </p:spPr>
+        <p:txBody>
+          <a:bodyPr wrap="square">
+            <a:spAutoFit/>
+          </a:bodyPr>
+          <a:lstStyle/>
+          <a:p>
+            <a:pPr>
+              <a:spcBef>
+                <a:spcPts val="500"/>
+              </a:spcBef>
+            </a:pPr>
+            <a:r>
+              <a:rPr sz="1500">
+                <a:solidFill>
+                  <a:srgbClr val="003DA5"/>
+                </a:solidFill>
+                <a:latin typeface="Arial"/>
+              </a:rPr>
+              <a:t>▪  </a:t>
+            </a:r>
+            <a:r>
+              <a:rPr sz="1700" b="1">
+                <a:solidFill>
+                  <a:srgbClr val="003DA5"/>
+                </a:solidFill>
+                <a:latin typeface="Arial"/>
+              </a:rPr>
+              <a:t>Vor dem Gespräch: </a:t>
+            </a:r>
+            <a:r>
+              <a:rPr sz="1700">
+                <a:solidFill>
+                  <a:srgbClr val="1A1A1A"/>
+                </a:solidFill>
+                <a:latin typeface="Arial"/>
+              </a:rPr>
+              <a:t>- [ ] Jahresabschluss und Vorjahresvergleich ausgewertet - [ ] 4+ Kennzahlen berechnet, Branchenvergleich notiert - [ ] 5 offene Fragen schriftlich vorbereitet - [ ] Gesprächsziel…</a:t>
+            </a:r>
+          </a:p>
+          <a:p>
+            <a:pPr>
+              <a:spcBef>
+                <a:spcPts val="500"/>
+              </a:spcBef>
+            </a:pPr>
+            <a:r>
+              <a:rPr sz="1500">
+                <a:solidFill>
+                  <a:srgbClr val="003DA5"/>
+                </a:solidFill>
+                <a:latin typeface="Arial"/>
+              </a:rPr>
+              <a:t>▪  </a:t>
+            </a:r>
+            <a:r>
+              <a:rPr sz="1700" b="1">
+                <a:solidFill>
+                  <a:srgbClr val="003DA5"/>
+                </a:solidFill>
+                <a:latin typeface="Arial"/>
+              </a:rPr>
+              <a:t>Im Gespräch: </a:t>
+            </a:r>
+            <a:r>
+              <a:rPr sz="1700">
+                <a:solidFill>
+                  <a:srgbClr val="1A1A1A"/>
+                </a:solidFill>
+                <a:latin typeface="Arial"/>
+              </a:rPr>
+              <a:t>- [ ] Positiver Einstieg, Agenda gesetzt - [ ] Mindestens 40 % Redezeit für den Kunden - [ ] Kritische Punkte mit offener Frage angesprochen - [ ] Handlungsoptionen gemeinsam…</a:t>
+            </a:r>
+          </a:p>
+          <a:p>
+            <a:pPr>
+              <a:spcBef>
+                <a:spcPts val="500"/>
+              </a:spcBef>
+            </a:pPr>
+            <a:r>
+              <a:rPr sz="1500">
+                <a:solidFill>
+                  <a:srgbClr val="003DA5"/>
+                </a:solidFill>
+                <a:latin typeface="Arial"/>
+              </a:rPr>
+              <a:t>▪  </a:t>
+            </a:r>
+            <a:r>
+              <a:rPr sz="1700" b="1">
+                <a:solidFill>
+                  <a:srgbClr val="003DA5"/>
+                </a:solidFill>
+                <a:latin typeface="Arial"/>
+              </a:rPr>
+              <a:t>Nach dem Gespräch: </a:t>
+            </a:r>
+            <a:r>
+              <a:rPr sz="1700">
+                <a:solidFill>
+                  <a:srgbClr val="1A1A1A"/>
+                </a:solidFill>
+                <a:latin typeface="Arial"/>
+              </a:rPr>
+              <a:t>- [ ] Gesprächsnotiz in agree CRM angelegt - [ ] Offene Punkte fristgerecht nachverfolgt</a:t>
+            </a:r>
+          </a:p>
+        </p:txBody>
+      </p:sp>
+    </p:spTree>
+  </p:cSld>
+  <p:clrMapOvr>
+    <a:masterClrMapping/>
+  </p:clrMapOvr>
+</p:sld>
+</file>
+
+<file path=ppt/slides/slide13.xml><?xml version="1.0" encoding="utf-8"?>
+<p:sld xmlns:a="http://schemas.openxmlformats.org/drawingml/2006/main" xmlns:p="http://schemas.openxmlformats.org/presentationml/2006/main" xmlns:r="http://schemas.openxmlformats.org/officeDocument/2006/relationships">
+  <p:cSld>
+    <p:bg>
+      <p:bgPr>
+        <a:solidFill>
+          <a:srgbClr val="1A1A1A"/>
+        </a:solidFill>
+        <a:effectLst/>
+      </p:bgPr>
+    </p:bg>
+    <p:spTree>
+      <p:nvGrpSpPr>
+        <p:cNvPr id="1" name=""/>
+        <p:cNvGrpSpPr/>
+        <p:nvPr/>
+      </p:nvGrpSpPr>
+      <p:grpSpPr/>
+      <p:sp>
+        <p:nvSpPr>
+          <p:cNvPr id="2" name="Rectangle 1"/>
+          <p:cNvSpPr/>
+          <p:nvPr/>
+        </p:nvSpPr>
+        <p:spPr>
+          <a:xfrm>
+            <a:off x="0" y="0"/>
+            <a:ext cx="73152" cy="6858000"/>
+          </a:xfrm>
+          <a:prstGeom prst="rect">
+            <a:avLst/>
+          </a:prstGeom>
+          <a:solidFill>
+            <a:srgbClr val="E05B00"/>
+          </a:solidFill>
+          <a:ln>
+            <a:noFill/>
+          </a:ln>
+        </p:spPr>
+        <p:style>
+          <a:lnRef idx="1">
+            <a:schemeClr val="accent1"/>
+          </a:lnRef>
+          <a:fillRef idx="3">
+            <a:schemeClr val="accent1"/>
+          </a:fillRef>
+          <a:effectRef idx="2">
+            <a:schemeClr val="accent1"/>
+          </a:effectRef>
+          <a:fontRef idx="minor">
+            <a:schemeClr val="lt1"/>
+          </a:fontRef>
+        </p:style>
+        <p:txBody>
+          <a:bodyPr rtlCol="0" anchor="ctr"/>
+          <a:lstStyle/>
+          <a:p>
+            <a:pPr algn="ctr"/>
+          </a:p>
+        </p:txBody>
+      </p:sp>
+      <p:sp>
+        <p:nvSpPr>
+          <p:cNvPr id="3" name="TextBox 2"/>
+          <p:cNvSpPr txBox="1"/>
+          <p:nvPr/>
+        </p:nvSpPr>
+        <p:spPr>
+          <a:xfrm>
+            <a:off x="365760" y="2011680"/>
+            <a:ext cx="11430000" cy="2011680"/>
+          </a:xfrm>
+          <a:prstGeom prst="rect">
+            <a:avLst/>
+          </a:prstGeom>
+          <a:noFill/>
+        </p:spPr>
+        <p:txBody>
+          <a:bodyPr wrap="square">
+            <a:spAutoFit/>
+          </a:bodyPr>
+          <a:lstStyle/>
+          <a:p>
+            <a:pPr algn="l"/>
+            <a:r>
+              <a:rPr sz="3600" b="1" i="0">
+                <a:solidFill>
+                  <a:srgbClr val="FFFFFF"/>
+                </a:solidFill>
+                <a:latin typeface="Arial"/>
+              </a:rPr>
+              <a:t>Reflexionsfragen</a:t>
+            </a:r>
+          </a:p>
+        </p:txBody>
+      </p:sp>
+    </p:spTree>
+  </p:cSld>
+  <p:clrMapOvr>
+    <a:masterClrMapping/>
+  </p:clrMapOvr>
+</p:sld>
+</file>
+
+<file path=ppt/slides/slide14.xml><?xml version="1.0" encoding="utf-8"?>
+<p:sld xmlns:a="http://schemas.openxmlformats.org/drawingml/2006/main" xmlns:p="http://schemas.openxmlformats.org/presentationml/2006/main" xmlns:r="http://schemas.openxmlformats.org/officeDocument/2006/relationships">
+  <p:cSld>
+    <p:bg>
+      <p:bgPr>
+        <a:solidFill>
+          <a:srgbClr val="FFFFFF"/>
+        </a:solidFill>
+        <a:effectLst/>
+      </p:bgPr>
+    </p:bg>
+    <p:spTree>
+      <p:nvGrpSpPr>
+        <p:cNvPr id="1" name=""/>
+        <p:cNvGrpSpPr/>
+        <p:nvPr/>
+      </p:nvGrpSpPr>
+      <p:grpSpPr/>
+      <p:sp>
+        <p:nvSpPr>
+          <p:cNvPr id="2" name="Rectangle 1"/>
+          <p:cNvSpPr/>
+          <p:nvPr/>
+        </p:nvSpPr>
+        <p:spPr>
+          <a:xfrm>
+            <a:off x="0" y="0"/>
+            <a:ext cx="73152" cy="6858000"/>
+          </a:xfrm>
+          <a:prstGeom prst="rect">
+            <a:avLst/>
+          </a:prstGeom>
+          <a:solidFill>
+            <a:srgbClr val="003DA5"/>
+          </a:solidFill>
+          <a:ln>
+            <a:noFill/>
+          </a:ln>
+        </p:spPr>
+        <p:style>
+          <a:lnRef idx="1">
+            <a:schemeClr val="accent1"/>
+          </a:lnRef>
+          <a:fillRef idx="3">
+            <a:schemeClr val="accent1"/>
+          </a:fillRef>
+          <a:effectRef idx="2">
+            <a:schemeClr val="accent1"/>
+          </a:effectRef>
+          <a:fontRef idx="minor">
+            <a:schemeClr val="lt1"/>
+          </a:fontRef>
+        </p:style>
+        <p:txBody>
+          <a:bodyPr rtlCol="0" anchor="ctr"/>
+          <a:lstStyle/>
+          <a:p>
+            <a:pPr algn="ctr"/>
+          </a:p>
+        </p:txBody>
+      </p:sp>
+      <p:sp>
+        <p:nvSpPr>
+          <p:cNvPr id="3" name="TextBox 2"/>
+          <p:cNvSpPr txBox="1"/>
+          <p:nvPr/>
+        </p:nvSpPr>
+        <p:spPr>
+          <a:xfrm>
+            <a:off x="228600" y="182880"/>
+            <a:ext cx="11430000" cy="320040"/>
+          </a:xfrm>
+          <a:prstGeom prst="rect">
+            <a:avLst/>
+          </a:prstGeom>
+          <a:noFill/>
+        </p:spPr>
+        <p:txBody>
+          <a:bodyPr wrap="square">
+            <a:spAutoFit/>
+          </a:bodyPr>
+          <a:lstStyle/>
+          <a:p>
+            <a:pPr algn="l"/>
+            <a:r>
+              <a:rPr sz="900" b="0" i="0">
+                <a:solidFill>
+                  <a:srgbClr val="556575"/>
+                </a:solidFill>
+                <a:latin typeface="Arial"/>
+              </a:rPr>
+              <a:t>M02 · Modulinhalte</a:t>
+            </a:r>
+          </a:p>
+        </p:txBody>
+      </p:sp>
+      <p:sp>
+        <p:nvSpPr>
+          <p:cNvPr id="4" name="TextBox 3"/>
+          <p:cNvSpPr txBox="1"/>
+          <p:nvPr/>
+        </p:nvSpPr>
+        <p:spPr>
+          <a:xfrm>
+            <a:off x="365760" y="274320"/>
+            <a:ext cx="11430000" cy="777240"/>
+          </a:xfrm>
+          <a:prstGeom prst="rect">
+            <a:avLst/>
+          </a:prstGeom>
+          <a:noFill/>
+        </p:spPr>
+        <p:txBody>
+          <a:bodyPr wrap="square">
+            <a:spAutoFit/>
+          </a:bodyPr>
+          <a:lstStyle/>
+          <a:p>
+            <a:pPr algn="l"/>
+            <a:r>
+              <a:rPr sz="2200" b="1" i="0">
+                <a:solidFill>
+                  <a:srgbClr val="003DA5"/>
+                </a:solidFill>
+                <a:latin typeface="Arial"/>
+              </a:rPr>
+              <a:t>Reflexionsfragen</a:t>
+            </a:r>
+          </a:p>
+        </p:txBody>
+      </p:sp>
+      <p:sp>
+        <p:nvSpPr>
+          <p:cNvPr id="5" name="Rectangle 4"/>
+          <p:cNvSpPr/>
+          <p:nvPr/>
+        </p:nvSpPr>
+        <p:spPr>
+          <a:xfrm>
+            <a:off x="365760" y="1005840"/>
+            <a:ext cx="11430000" cy="27432"/>
+          </a:xfrm>
+          <a:prstGeom prst="rect">
+            <a:avLst/>
+          </a:prstGeom>
+          <a:solidFill>
+            <a:srgbClr val="D1D5DB"/>
+          </a:solidFill>
+          <a:ln>
+            <a:noFill/>
+          </a:ln>
+        </p:spPr>
+        <p:style>
+          <a:lnRef idx="1">
+            <a:schemeClr val="accent1"/>
+          </a:lnRef>
+          <a:fillRef idx="3">
+            <a:schemeClr val="accent1"/>
+          </a:fillRef>
+          <a:effectRef idx="2">
+            <a:schemeClr val="accent1"/>
+          </a:effectRef>
+          <a:fontRef idx="minor">
+            <a:schemeClr val="lt1"/>
+          </a:fontRef>
+        </p:style>
+        <p:txBody>
+          <a:bodyPr rtlCol="0" anchor="ctr"/>
+          <a:lstStyle/>
+          <a:p>
+            <a:pPr algn="ctr"/>
+          </a:p>
+        </p:txBody>
+      </p:sp>
+      <p:sp>
+        <p:nvSpPr>
+          <p:cNvPr id="6" name="Rectangle 5"/>
+          <p:cNvSpPr/>
+          <p:nvPr/>
+        </p:nvSpPr>
+        <p:spPr>
+          <a:xfrm>
+            <a:off x="365760" y="1188720"/>
+            <a:ext cx="457200" cy="411480"/>
+          </a:xfrm>
+          <a:prstGeom prst="rect">
+            <a:avLst/>
+          </a:prstGeom>
+          <a:solidFill>
+            <a:srgbClr val="003DA5"/>
+          </a:solidFill>
+          <a:ln>
+            <a:noFill/>
+          </a:ln>
+        </p:spPr>
+        <p:style>
+          <a:lnRef idx="1">
+            <a:schemeClr val="accent1"/>
+          </a:lnRef>
+          <a:fillRef idx="3">
+            <a:schemeClr val="accent1"/>
+          </a:fillRef>
+          <a:effectRef idx="2">
+            <a:schemeClr val="accent1"/>
+          </a:effectRef>
+          <a:fontRef idx="minor">
+            <a:schemeClr val="lt1"/>
+          </a:fontRef>
+        </p:style>
+        <p:txBody>
+          <a:bodyPr rtlCol="0" anchor="ctr"/>
+          <a:lstStyle/>
+          <a:p>
+            <a:pPr algn="ctr"/>
+          </a:p>
+        </p:txBody>
+      </p:sp>
+      <p:sp>
+        <p:nvSpPr>
+          <p:cNvPr id="7" name="TextBox 6"/>
+          <p:cNvSpPr txBox="1"/>
+          <p:nvPr/>
+        </p:nvSpPr>
+        <p:spPr>
+          <a:xfrm>
+            <a:off x="365760" y="1188720"/>
+            <a:ext cx="457200" cy="411480"/>
+          </a:xfrm>
+          <a:prstGeom prst="rect">
+            <a:avLst/>
+          </a:prstGeom>
+          <a:noFill/>
+        </p:spPr>
+        <p:txBody>
+          <a:bodyPr wrap="square">
+            <a:spAutoFit/>
+          </a:bodyPr>
+          <a:lstStyle/>
+          <a:p>
+            <a:pPr algn="ctr"/>
+            <a:r>
+              <a:rPr sz="1400" b="1" i="0">
+                <a:solidFill>
+                  <a:srgbClr val="FFFFFF"/>
+                </a:solidFill>
+                <a:latin typeface="Arial"/>
+              </a:rPr>
+              <a:t>1</a:t>
+            </a:r>
+          </a:p>
+        </p:txBody>
+      </p:sp>
+      <p:sp>
+        <p:nvSpPr>
+          <p:cNvPr id="8" name="TextBox 7"/>
+          <p:cNvSpPr txBox="1"/>
+          <p:nvPr/>
+        </p:nvSpPr>
+        <p:spPr>
+          <a:xfrm>
+            <a:off x="960120" y="1188720"/>
+            <a:ext cx="10698480" cy="502920"/>
+          </a:xfrm>
+          <a:prstGeom prst="rect">
+            <a:avLst/>
+          </a:prstGeom>
+          <a:noFill/>
+        </p:spPr>
+        <p:txBody>
+          <a:bodyPr wrap="square">
+            <a:spAutoFit/>
+          </a:bodyPr>
+          <a:lstStyle/>
+          <a:p>
+            <a:pPr algn="l"/>
+            <a:r>
+              <a:rPr sz="1500" b="0" i="0">
+                <a:solidFill>
+                  <a:srgbClr val="1A1A1A"/>
+                </a:solidFill>
+                <a:latin typeface="Arial"/>
+              </a:rPr>
+              <a:t>An welcher Stelle im Rollenspiel haben Sie sich am wohlsten gefühlt? Warum?</a:t>
+            </a:r>
+          </a:p>
+        </p:txBody>
+      </p:sp>
+      <p:sp>
+        <p:nvSpPr>
+          <p:cNvPr id="9" name="Rectangle 8"/>
+          <p:cNvSpPr/>
+          <p:nvPr/>
+        </p:nvSpPr>
+        <p:spPr>
+          <a:xfrm>
+            <a:off x="365760" y="1920240"/>
+            <a:ext cx="457200" cy="411480"/>
+          </a:xfrm>
+          <a:prstGeom prst="rect">
+            <a:avLst/>
+          </a:prstGeom>
+          <a:solidFill>
+            <a:srgbClr val="003DA5"/>
+          </a:solidFill>
+          <a:ln>
+            <a:noFill/>
+          </a:ln>
+        </p:spPr>
+        <p:style>
+          <a:lnRef idx="1">
+            <a:schemeClr val="accent1"/>
+          </a:lnRef>
+          <a:fillRef idx="3">
+            <a:schemeClr val="accent1"/>
+          </a:fillRef>
+          <a:effectRef idx="2">
+            <a:schemeClr val="accent1"/>
+          </a:effectRef>
+          <a:fontRef idx="minor">
+            <a:schemeClr val="lt1"/>
+          </a:fontRef>
+        </p:style>
+        <p:txBody>
+          <a:bodyPr rtlCol="0" anchor="ctr"/>
+          <a:lstStyle/>
+          <a:p>
+            <a:pPr algn="ctr"/>
+          </a:p>
+        </p:txBody>
+      </p:sp>
+      <p:sp>
+        <p:nvSpPr>
+          <p:cNvPr id="10" name="TextBox 9"/>
+          <p:cNvSpPr txBox="1"/>
+          <p:nvPr/>
+        </p:nvSpPr>
+        <p:spPr>
+          <a:xfrm>
+            <a:off x="365760" y="1920240"/>
+            <a:ext cx="457200" cy="411480"/>
+          </a:xfrm>
+          <a:prstGeom prst="rect">
+            <a:avLst/>
+          </a:prstGeom>
+          <a:noFill/>
+        </p:spPr>
+        <p:txBody>
+          <a:bodyPr wrap="square">
+            <a:spAutoFit/>
+          </a:bodyPr>
+          <a:lstStyle/>
+          <a:p>
+            <a:pPr algn="ctr"/>
+            <a:r>
+              <a:rPr sz="1400" b="1" i="0">
+                <a:solidFill>
+                  <a:srgbClr val="FFFFFF"/>
+                </a:solidFill>
+                <a:latin typeface="Arial"/>
+              </a:rPr>
+              <a:t>2</a:t>
+            </a:r>
+          </a:p>
+        </p:txBody>
+      </p:sp>
+      <p:sp>
+        <p:nvSpPr>
+          <p:cNvPr id="11" name="TextBox 10"/>
+          <p:cNvSpPr txBox="1"/>
+          <p:nvPr/>
+        </p:nvSpPr>
+        <p:spPr>
+          <a:xfrm>
+            <a:off x="960120" y="1920240"/>
+            <a:ext cx="10698480" cy="502920"/>
+          </a:xfrm>
+          <a:prstGeom prst="rect">
+            <a:avLst/>
+          </a:prstGeom>
+          <a:noFill/>
+        </p:spPr>
+        <p:txBody>
+          <a:bodyPr wrap="square">
+            <a:spAutoFit/>
+          </a:bodyPr>
+          <a:lstStyle/>
+          <a:p>
+            <a:pPr algn="l"/>
+            <a:r>
+              <a:rPr sz="1500" b="0" i="0">
+                <a:solidFill>
+                  <a:srgbClr val="1A1A1A"/>
+                </a:solidFill>
+                <a:latin typeface="Arial"/>
+              </a:rPr>
+              <a:t>Wo haben Sie gemerkt, dass Ihnen eine Technik noch nicht in Fleisch und Blut übergegangen ist?</a:t>
+            </a:r>
+          </a:p>
+        </p:txBody>
+      </p:sp>
+      <p:sp>
+        <p:nvSpPr>
+          <p:cNvPr id="12" name="Rectangle 11"/>
+          <p:cNvSpPr/>
+          <p:nvPr/>
+        </p:nvSpPr>
+        <p:spPr>
+          <a:xfrm>
+            <a:off x="365760" y="2651760"/>
+            <a:ext cx="457200" cy="411480"/>
+          </a:xfrm>
+          <a:prstGeom prst="rect">
+            <a:avLst/>
+          </a:prstGeom>
+          <a:solidFill>
+            <a:srgbClr val="003DA5"/>
+          </a:solidFill>
+          <a:ln>
+            <a:noFill/>
+          </a:ln>
+        </p:spPr>
+        <p:style>
+          <a:lnRef idx="1">
+            <a:schemeClr val="accent1"/>
+          </a:lnRef>
+          <a:fillRef idx="3">
+            <a:schemeClr val="accent1"/>
+          </a:fillRef>
+          <a:effectRef idx="2">
+            <a:schemeClr val="accent1"/>
+          </a:effectRef>
+          <a:fontRef idx="minor">
+            <a:schemeClr val="lt1"/>
+          </a:fontRef>
+        </p:style>
+        <p:txBody>
+          <a:bodyPr rtlCol="0" anchor="ctr"/>
+          <a:lstStyle/>
+          <a:p>
+            <a:pPr algn="ctr"/>
+          </a:p>
+        </p:txBody>
+      </p:sp>
+      <p:sp>
+        <p:nvSpPr>
+          <p:cNvPr id="13" name="TextBox 12"/>
+          <p:cNvSpPr txBox="1"/>
+          <p:nvPr/>
+        </p:nvSpPr>
+        <p:spPr>
+          <a:xfrm>
+            <a:off x="365760" y="2651760"/>
+            <a:ext cx="457200" cy="411480"/>
+          </a:xfrm>
+          <a:prstGeom prst="rect">
+            <a:avLst/>
+          </a:prstGeom>
+          <a:noFill/>
+        </p:spPr>
+        <p:txBody>
+          <a:bodyPr wrap="square">
+            <a:spAutoFit/>
+          </a:bodyPr>
+          <a:lstStyle/>
+          <a:p>
+            <a:pPr algn="ctr"/>
+            <a:r>
+              <a:rPr sz="1400" b="1" i="0">
+                <a:solidFill>
+                  <a:srgbClr val="FFFFFF"/>
+                </a:solidFill>
+                <a:latin typeface="Arial"/>
+              </a:rPr>
+              <a:t>3</a:t>
+            </a:r>
+          </a:p>
+        </p:txBody>
+      </p:sp>
+      <p:sp>
+        <p:nvSpPr>
+          <p:cNvPr id="14" name="TextBox 13"/>
+          <p:cNvSpPr txBox="1"/>
+          <p:nvPr/>
+        </p:nvSpPr>
+        <p:spPr>
+          <a:xfrm>
+            <a:off x="960120" y="2651760"/>
+            <a:ext cx="10698480" cy="502920"/>
+          </a:xfrm>
+          <a:prstGeom prst="rect">
+            <a:avLst/>
+          </a:prstGeom>
+          <a:noFill/>
+        </p:spPr>
+        <p:txBody>
+          <a:bodyPr wrap="square">
+            <a:spAutoFit/>
+          </a:bodyPr>
+          <a:lstStyle/>
+          <a:p>
+            <a:pPr algn="l"/>
+            <a:r>
+              <a:rPr sz="1500" b="0" i="0">
+                <a:solidFill>
+                  <a:srgbClr val="1A1A1A"/>
+                </a:solidFill>
+                <a:latin typeface="Arial"/>
+              </a:rPr>
+              <a:t>Welchen konkreten Kunden würden Sie gerne beim nächsten Gespräch mit den neuen Techniken ansprechen?</a:t>
+            </a:r>
+          </a:p>
+        </p:txBody>
+      </p:sp>
+      <p:sp>
+        <p:nvSpPr>
+          <p:cNvPr id="15" name="Rectangle 14"/>
+          <p:cNvSpPr/>
+          <p:nvPr/>
+        </p:nvSpPr>
+        <p:spPr>
+          <a:xfrm>
+            <a:off x="365760" y="3383280"/>
+            <a:ext cx="457200" cy="411480"/>
+          </a:xfrm>
+          <a:prstGeom prst="rect">
+            <a:avLst/>
+          </a:prstGeom>
+          <a:solidFill>
+            <a:srgbClr val="003DA5"/>
+          </a:solidFill>
+          <a:ln>
+            <a:noFill/>
+          </a:ln>
+        </p:spPr>
+        <p:style>
+          <a:lnRef idx="1">
+            <a:schemeClr val="accent1"/>
+          </a:lnRef>
+          <a:fillRef idx="3">
+            <a:schemeClr val="accent1"/>
+          </a:fillRef>
+          <a:effectRef idx="2">
+            <a:schemeClr val="accent1"/>
+          </a:effectRef>
+          <a:fontRef idx="minor">
+            <a:schemeClr val="lt1"/>
+          </a:fontRef>
+        </p:style>
+        <p:txBody>
+          <a:bodyPr rtlCol="0" anchor="ctr"/>
+          <a:lstStyle/>
+          <a:p>
+            <a:pPr algn="ctr"/>
+          </a:p>
+        </p:txBody>
+      </p:sp>
+      <p:sp>
+        <p:nvSpPr>
+          <p:cNvPr id="16" name="TextBox 15"/>
+          <p:cNvSpPr txBox="1"/>
+          <p:nvPr/>
+        </p:nvSpPr>
+        <p:spPr>
+          <a:xfrm>
+            <a:off x="365760" y="3383280"/>
+            <a:ext cx="457200" cy="411480"/>
+          </a:xfrm>
+          <a:prstGeom prst="rect">
+            <a:avLst/>
+          </a:prstGeom>
+          <a:noFill/>
+        </p:spPr>
+        <p:txBody>
+          <a:bodyPr wrap="square">
+            <a:spAutoFit/>
+          </a:bodyPr>
+          <a:lstStyle/>
+          <a:p>
+            <a:pPr algn="ctr"/>
+            <a:r>
+              <a:rPr sz="1400" b="1" i="0">
+                <a:solidFill>
+                  <a:srgbClr val="FFFFFF"/>
+                </a:solidFill>
+                <a:latin typeface="Arial"/>
+              </a:rPr>
+              <a:t>4</a:t>
+            </a:r>
+          </a:p>
+        </p:txBody>
+      </p:sp>
+      <p:sp>
+        <p:nvSpPr>
+          <p:cNvPr id="17" name="TextBox 16"/>
+          <p:cNvSpPr txBox="1"/>
+          <p:nvPr/>
+        </p:nvSpPr>
+        <p:spPr>
+          <a:xfrm>
+            <a:off x="960120" y="3383280"/>
+            <a:ext cx="10698480" cy="502920"/>
+          </a:xfrm>
+          <a:prstGeom prst="rect">
+            <a:avLst/>
+          </a:prstGeom>
+          <a:noFill/>
+        </p:spPr>
+        <p:txBody>
+          <a:bodyPr wrap="square">
+            <a:spAutoFit/>
+          </a:bodyPr>
+          <a:lstStyle/>
+          <a:p>
+            <a:pPr algn="l"/>
+            <a:r>
+              <a:rPr sz="1500" b="0" i="0">
+                <a:solidFill>
+                  <a:srgbClr val="1A1A1A"/>
+                </a:solidFill>
+                <a:latin typeface="Arial"/>
+              </a:rPr>
+              <a:t>Was nehmen Sie sich vor, beim nächsten echten Bilanzgespräch anders zu machen?</a:t>
+            </a:r>
+          </a:p>
+        </p:txBody>
+      </p:sp>
+    </p:spTree>
+  </p:cSld>
+  <p:clrMapOvr>
+    <a:masterClrMapping/>
+  </p:clrMapOvr>
+</p:sld>
+</file>
+
+<file path=ppt/slides/slide15.xml><?xml version="1.0" encoding="utf-8"?>
 <p:sld xmlns:a="http://schemas.openxmlformats.org/drawingml/2006/main" xmlns:p="http://schemas.openxmlformats.org/presentationml/2006/main" xmlns:r="http://schemas.openxmlformats.org/officeDocument/2006/relationships">
   <p:cSld>
     <p:bg>
@@ -3513,8 +5247,8 @@
         </p:nvSpPr>
         <p:spPr>
           <a:xfrm>
-            <a:off x="365760" y="365760"/>
-            <a:ext cx="5486400" cy="365760"/>
+            <a:off x="365760" y="347472"/>
+            <a:ext cx="7315200" cy="384048"/>
           </a:xfrm>
           <a:prstGeom prst="rect">
             <a:avLst/>
@@ -3529,62 +5263,27 @@
           <a:p>
             <a:pPr algn="l"/>
             <a:r>
-              <a:rPr sz="1000" b="1">
+              <a:rPr sz="900" b="1" i="0">
                 <a:solidFill>
                   <a:srgbClr val="CCD6F0"/>
                 </a:solidFill>
                 <a:latin typeface="Arial"/>
               </a:rPr>
-              <a:t>PRAXISTRANSFER</a:t>
-            </a:r>
-          </a:p>
-        </p:txBody>
-      </p:sp>
-      <p:sp>
-        <p:nvSpPr>
-          <p:cNvPr id="4" name="TextBox 3"/>
-          <p:cNvSpPr txBox="1"/>
-          <p:nvPr/>
-        </p:nvSpPr>
-        <p:spPr>
-          <a:xfrm>
-            <a:off x="365760" y="640080"/>
-            <a:ext cx="9144000" cy="914400"/>
-          </a:xfrm>
-          <a:prstGeom prst="rect">
-            <a:avLst/>
-          </a:prstGeom>
-          <a:noFill/>
-        </p:spPr>
-        <p:txBody>
-          <a:bodyPr wrap="square">
-            <a:spAutoFit/>
-          </a:bodyPr>
-          <a:lstStyle/>
-          <a:p>
-            <a:pPr algn="l"/>
-            <a:r>
-              <a:rPr sz="2800" b="1">
-                <a:solidFill>
-                  <a:srgbClr val="FFFFFF"/>
-                </a:solidFill>
-                <a:latin typeface="Arial"/>
-              </a:rPr>
-              <a:t>Was nehmen Sie mit?</a:t>
-            </a:r>
-          </a:p>
-        </p:txBody>
-      </p:sp>
-      <p:sp>
-        <p:nvSpPr>
-          <p:cNvPr id="5" name="Rectangle 4"/>
+              <a:t>PRAXISTRANSFER &amp; NÄCHSTE SCHRITTE</a:t>
+            </a:r>
+          </a:p>
+        </p:txBody>
+      </p:sp>
+      <p:sp>
+        <p:nvSpPr>
+          <p:cNvPr id="4" name="Rectangle 3"/>
           <p:cNvSpPr/>
           <p:nvPr/>
         </p:nvSpPr>
         <p:spPr>
           <a:xfrm>
-            <a:off x="365760" y="1463040"/>
-            <a:ext cx="7315200" cy="27432"/>
+            <a:off x="365760" y="804672"/>
+            <a:ext cx="8229600" cy="22860"/>
           </a:xfrm>
           <a:prstGeom prst="rect">
             <a:avLst/>
@@ -3620,14 +5319,14 @@
       </p:sp>
       <p:sp>
         <p:nvSpPr>
-          <p:cNvPr id="6" name="TextBox 5"/>
+          <p:cNvPr id="5" name="TextBox 4"/>
           <p:cNvSpPr txBox="1"/>
           <p:nvPr/>
         </p:nvSpPr>
         <p:spPr>
           <a:xfrm>
-            <a:off x="365760" y="1645920"/>
-            <a:ext cx="11430000" cy="4114800"/>
+            <a:off x="365760" y="960120"/>
+            <a:ext cx="9144000" cy="914400"/>
           </a:xfrm>
           <a:prstGeom prst="rect">
             <a:avLst/>
@@ -3640,67 +5339,29 @@
           </a:bodyPr>
           <a:lstStyle/>
           <a:p>
-            <a:pPr>
-              <a:spcBef>
-                <a:spcPts val="400"/>
-              </a:spcBef>
-            </a:pPr>
-            <a:r>
-              <a:rPr sz="1600">
-                <a:solidFill>
-                  <a:srgbClr val="E05B00"/>
-                </a:solidFill>
-                <a:latin typeface="Arial"/>
-              </a:rPr>
-              <a:t>▪  </a:t>
-            </a:r>
-            <a:r>
-              <a:rPr sz="1800">
+            <a:pPr algn="l"/>
+            <a:r>
+              <a:rPr sz="3000" b="1" i="0">
                 <a:solidFill>
                   <a:srgbClr val="FFFFFF"/>
                 </a:solidFill>
                 <a:latin typeface="Arial"/>
               </a:rPr>
-              <a:t>Transferaufgabe: Wenden Sie das Gelernte in den nächsten 14 Tagen bei einem konkreten Kunden an.</a:t>
-            </a:r>
-          </a:p>
-          <a:p>
-            <a:pPr>
-              <a:spcBef>
-                <a:spcPts val="400"/>
-              </a:spcBef>
-            </a:pPr>
-            <a:r>
-              <a:rPr sz="1600">
-                <a:solidFill>
-                  <a:srgbClr val="E05B00"/>
-                </a:solidFill>
-                <a:latin typeface="Arial"/>
-              </a:rPr>
-              <a:t>▪  </a:t>
-            </a:r>
-            <a:r>
-              <a:rPr sz="1800">
-                <a:solidFill>
-                  <a:srgbClr val="FFFFFF"/>
-                </a:solidFill>
-                <a:latin typeface="Arial"/>
-              </a:rPr>
-              <a:t>Selbstcheck nach 4 Wochen: Was hat sich verändert?</a:t>
-            </a:r>
-          </a:p>
-        </p:txBody>
-      </p:sp>
-      <p:sp>
-        <p:nvSpPr>
-          <p:cNvPr id="7" name="TextBox 6"/>
+              <a:t>Was nehmen Sie mit?</a:t>
+            </a:r>
+          </a:p>
+        </p:txBody>
+      </p:sp>
+      <p:sp>
+        <p:nvSpPr>
+          <p:cNvPr id="6" name="TextBox 5"/>
           <p:cNvSpPr txBox="1"/>
           <p:nvPr/>
         </p:nvSpPr>
         <p:spPr>
           <a:xfrm>
-            <a:off x="365760" y="6309360"/>
-            <a:ext cx="11430000" cy="365760"/>
+            <a:off x="365760" y="2103120"/>
+            <a:ext cx="11430000" cy="4114800"/>
           </a:xfrm>
           <a:prstGeom prst="rect">
             <a:avLst/>
@@ -3713,11 +5374,109 @@
           </a:bodyPr>
           <a:lstStyle/>
           <a:p>
+            <a:pPr>
+              <a:spcBef>
+                <a:spcPts val="500"/>
+              </a:spcBef>
+            </a:pPr>
+            <a:r>
+              <a:rPr sz="1600">
+                <a:solidFill>
+                  <a:srgbClr val="E05B00"/>
+                </a:solidFill>
+                <a:latin typeface="Arial"/>
+              </a:rPr>
+              <a:t>▪  </a:t>
+            </a:r>
+            <a:r>
+              <a:rPr sz="1800">
+                <a:solidFill>
+                  <a:srgbClr val="FFFFFF"/>
+                </a:solidFill>
+                <a:latin typeface="Arial"/>
+              </a:rPr>
+              <a:t>Transferaufgabe: Wenden Sie das Gelernte in den nächsten 14 Tagen bei einem konkreten Kunden an.</a:t>
+            </a:r>
+          </a:p>
+          <a:p>
+            <a:pPr>
+              <a:spcBef>
+                <a:spcPts val="500"/>
+              </a:spcBef>
+            </a:pPr>
+            <a:r>
+              <a:rPr sz="1600">
+                <a:solidFill>
+                  <a:srgbClr val="E05B00"/>
+                </a:solidFill>
+                <a:latin typeface="Arial"/>
+              </a:rPr>
+              <a:t>▪  </a:t>
+            </a:r>
+            <a:r>
+              <a:rPr sz="1800">
+                <a:solidFill>
+                  <a:srgbClr val="FFFFFF"/>
+                </a:solidFill>
+                <a:latin typeface="Arial"/>
+              </a:rPr>
+              <a:t>Selbstcheck nach 4 Wochen: Bewerten Sie Ihre Fortschritte ehrlich.</a:t>
+            </a:r>
+          </a:p>
+          <a:p>
+            <a:pPr>
+              <a:spcBef>
+                <a:spcPts val="500"/>
+              </a:spcBef>
+            </a:pPr>
+            <a:r>
+              <a:rPr sz="1600">
+                <a:solidFill>
+                  <a:srgbClr val="E05B00"/>
+                </a:solidFill>
+                <a:latin typeface="Arial"/>
+              </a:rPr>
+              <a:t>▪  </a:t>
+            </a:r>
+            <a:r>
+              <a:rPr sz="1800">
+                <a:solidFill>
+                  <a:srgbClr val="FFFFFF"/>
+                </a:solidFill>
+                <a:latin typeface="Arial"/>
+              </a:rPr>
+              <a:t>Nächste Module: M03, M21</a:t>
+            </a:r>
+          </a:p>
+        </p:txBody>
+      </p:sp>
+      <p:sp>
+        <p:nvSpPr>
+          <p:cNvPr id="7" name="TextBox 6"/>
+          <p:cNvSpPr txBox="1"/>
+          <p:nvPr/>
+        </p:nvSpPr>
+        <p:spPr>
+          <a:xfrm>
+            <a:off x="365760" y="6309360"/>
+            <a:ext cx="11430000" cy="365760"/>
+          </a:xfrm>
+          <a:prstGeom prst="rect">
+            <a:avLst/>
+          </a:prstGeom>
+          <a:noFill/>
+        </p:spPr>
+        <p:txBody>
+          <a:bodyPr wrap="square">
+            <a:spAutoFit/>
+          </a:bodyPr>
+          <a:lstStyle/>
+          <a:p>
             <a:pPr algn="l"/>
             <a:r>
-              <a:rPr sz="900" b="0">
-                <a:solidFill>
-                  <a:srgbClr val="99AACC"/>
+              <a:rPr sz="900" b="0" i="0">
+                <a:solidFill>
+                  <a:srgbClr val="889ACC"/>
                 </a:solidFill>
                 <a:latin typeface="Arial"/>
               </a:rPr>
@@ -3740,7 +5499,7 @@
     <p:bg>
       <p:bgPr>
         <a:solidFill>
-          <a:srgbClr val="F5F7FA"/>
+          <a:srgbClr val="F4F6FA"/>
         </a:solidFill>
         <a:effectLst/>
       </p:bgPr>
@@ -3803,14 +5562,14 @@
         </p:nvSpPr>
         <p:spPr>
           <a:xfrm>
-            <a:off x="365760" y="868680"/>
-            <a:ext cx="7315200" cy="27432"/>
+            <a:off x="228600" y="804672"/>
+            <a:ext cx="11612880" cy="22860"/>
           </a:xfrm>
           <a:prstGeom prst="rect">
             <a:avLst/>
           </a:prstGeom>
           <a:solidFill>
-            <a:srgbClr val="E5E7EB"/>
+            <a:srgbClr val="D1D5DB"/>
           </a:solidFill>
           <a:ln>
             <a:noFill/>
@@ -3847,7 +5606,7 @@
         <p:spPr>
           <a:xfrm>
             <a:off x="365760" y="320040"/>
-            <a:ext cx="3657600" cy="365760"/>
+            <a:ext cx="4572000" cy="347472"/>
           </a:xfrm>
           <a:prstGeom prst="rect">
             <a:avLst/>
@@ -3862,7 +5621,7 @@
           <a:p>
             <a:pPr algn="l"/>
             <a:r>
-              <a:rPr sz="1000" b="1">
+              <a:rPr sz="900" b="1" i="0">
                 <a:solidFill>
                   <a:srgbClr val="003DA5"/>
                 </a:solidFill>
@@ -3882,7 +5641,7 @@
         <p:spPr>
           <a:xfrm>
             <a:off x="365760" y="502920"/>
-            <a:ext cx="9144000" cy="548640"/>
+            <a:ext cx="10058400" cy="640080"/>
           </a:xfrm>
           <a:prstGeom prst="rect">
             <a:avLst/>
@@ -3897,7 +5656,7 @@
           <a:p>
             <a:pPr algn="l"/>
             <a:r>
-              <a:rPr sz="2200" b="1">
+              <a:rPr sz="2400" b="1" i="0">
                 <a:solidFill>
                   <a:srgbClr val="1A1A1A"/>
                 </a:solidFill>
@@ -3916,7 +5675,7 @@
         </p:nvSpPr>
         <p:spPr>
           <a:xfrm>
-            <a:off x="365760" y="1188720"/>
+            <a:off x="365760" y="1234440"/>
             <a:ext cx="11430000" cy="5303520"/>
           </a:xfrm>
           <a:prstGeom prst="rect">
@@ -3932,11 +5691,11 @@
           <a:p>
             <a:pPr>
               <a:spcBef>
-                <a:spcPts val="400"/>
+                <a:spcPts val="500"/>
               </a:spcBef>
             </a:pPr>
             <a:r>
-              <a:rPr sz="1400">
+              <a:rPr sz="1500">
                 <a:solidFill>
                   <a:srgbClr val="003DA5"/>
                 </a:solidFill>
@@ -3945,7 +5704,7 @@
               <a:t>▪  </a:t>
             </a:r>
             <a:r>
-              <a:rPr sz="1600">
+              <a:rPr sz="1700">
                 <a:solidFill>
                   <a:srgbClr val="1A1A1A"/>
                 </a:solidFill>
@@ -3957,11 +5716,11 @@
           <a:p>
             <a:pPr>
               <a:spcBef>
-                <a:spcPts val="400"/>
+                <a:spcPts val="500"/>
               </a:spcBef>
             </a:pPr>
             <a:r>
-              <a:rPr sz="1400">
+              <a:rPr sz="1500">
                 <a:solidFill>
                   <a:srgbClr val="003DA5"/>
                 </a:solidFill>
@@ -3970,7 +5729,7 @@
               <a:t>▪  </a:t>
             </a:r>
             <a:r>
-              <a:rPr sz="1600">
+              <a:rPr sz="1700">
                 <a:solidFill>
                   <a:srgbClr val="1A1A1A"/>
                 </a:solidFill>
@@ -3982,11 +5741,11 @@
           <a:p>
             <a:pPr>
               <a:spcBef>
-                <a:spcPts val="400"/>
+                <a:spcPts val="500"/>
               </a:spcBef>
             </a:pPr>
             <a:r>
-              <a:rPr sz="1400">
+              <a:rPr sz="1500">
                 <a:solidFill>
                   <a:srgbClr val="003DA5"/>
                 </a:solidFill>
@@ -3995,7 +5754,7 @@
               <a:t>▪  </a:t>
             </a:r>
             <a:r>
-              <a:rPr sz="1600">
+              <a:rPr sz="1700">
                 <a:solidFill>
                   <a:srgbClr val="1A1A1A"/>
                 </a:solidFill>
@@ -4007,11 +5766,11 @@
           <a:p>
             <a:pPr>
               <a:spcBef>
-                <a:spcPts val="400"/>
+                <a:spcPts val="500"/>
               </a:spcBef>
             </a:pPr>
             <a:r>
-              <a:rPr sz="1400">
+              <a:rPr sz="1500">
                 <a:solidFill>
                   <a:srgbClr val="003DA5"/>
                 </a:solidFill>
@@ -4020,7 +5779,7 @@
               <a:t>▪  </a:t>
             </a:r>
             <a:r>
-              <a:rPr sz="1600">
+              <a:rPr sz="1700">
                 <a:solidFill>
                   <a:srgbClr val="1A1A1A"/>
                 </a:solidFill>
@@ -4032,11 +5791,11 @@
           <a:p>
             <a:pPr>
               <a:spcBef>
-                <a:spcPts val="400"/>
+                <a:spcPts val="500"/>
               </a:spcBef>
             </a:pPr>
             <a:r>
-              <a:rPr sz="1400">
+              <a:rPr sz="1500">
                 <a:solidFill>
                   <a:srgbClr val="003DA5"/>
                 </a:solidFill>
@@ -4045,7 +5804,7 @@
               <a:t>▪  </a:t>
             </a:r>
             <a:r>
-              <a:rPr sz="1600">
+              <a:rPr sz="1700">
                 <a:solidFill>
                   <a:srgbClr val="1A1A1A"/>
                 </a:solidFill>
@@ -4070,7 +5829,7 @@
     <p:bg>
       <p:bgPr>
         <a:solidFill>
-          <a:srgbClr val="FFFFFF"/>
+          <a:srgbClr val="1A1A1A"/>
         </a:solidFill>
         <a:effectLst/>
       </p:bgPr>
@@ -4097,7 +5856,7 @@
             <a:avLst/>
           </a:prstGeom>
           <a:solidFill>
-            <a:srgbClr val="003DA5"/>
+            <a:srgbClr val="E05B00"/>
           </a:solidFill>
           <a:ln>
             <a:noFill/>
@@ -4133,8 +5892,8 @@
         </p:nvSpPr>
         <p:spPr>
           <a:xfrm>
-            <a:off x="365760" y="274320"/>
-            <a:ext cx="11430000" cy="822960"/>
+            <a:off x="365760" y="2011680"/>
+            <a:ext cx="11430000" cy="2011680"/>
           </a:xfrm>
           <a:prstGeom prst="rect">
             <a:avLst/>
@@ -4149,189 +5908,13 @@
           <a:p>
             <a:pPr algn="l"/>
             <a:r>
-              <a:rPr sz="2200" b="1">
-                <a:solidFill>
-                  <a:srgbClr val="003DA5"/>
-                </a:solidFill>
-                <a:latin typeface="Arial"/>
-              </a:rPr>
-              <a:t>Die Grenzen der reinen Kennzahlenanalyse</a:t>
-            </a:r>
-          </a:p>
-        </p:txBody>
-      </p:sp>
-      <p:sp>
-        <p:nvSpPr>
-          <p:cNvPr id="4" name="Rectangle 3"/>
-          <p:cNvSpPr/>
-          <p:nvPr/>
-        </p:nvSpPr>
-        <p:spPr>
-          <a:xfrm>
-            <a:off x="365760" y="1051560"/>
-            <a:ext cx="11430000" cy="27432"/>
-          </a:xfrm>
-          <a:prstGeom prst="rect">
-            <a:avLst/>
-          </a:prstGeom>
-          <a:solidFill>
-            <a:srgbClr val="E5E7EB"/>
-          </a:solidFill>
-          <a:ln>
-            <a:noFill/>
-          </a:ln>
-        </p:spPr>
-        <p:style>
-          <a:lnRef idx="1">
-            <a:schemeClr val="accent1"/>
-          </a:lnRef>
-          <a:fillRef idx="3">
-            <a:schemeClr val="accent1"/>
-          </a:fillRef>
-          <a:effectRef idx="2">
-            <a:schemeClr val="accent1"/>
-          </a:effectRef>
-          <a:fontRef idx="minor">
-            <a:schemeClr val="lt1"/>
-          </a:fontRef>
-        </p:style>
-        <p:txBody>
-          <a:bodyPr rtlCol="0" anchor="ctr"/>
-          <a:lstStyle/>
-          <a:p>
-            <a:pPr algn="ctr"/>
-          </a:p>
-        </p:txBody>
-      </p:sp>
-      <p:sp>
-        <p:nvSpPr>
-          <p:cNvPr id="5" name="TextBox 4"/>
-          <p:cNvSpPr txBox="1"/>
-          <p:nvPr/>
-        </p:nvSpPr>
-        <p:spPr>
-          <a:xfrm>
-            <a:off x="365760" y="1234440"/>
-            <a:ext cx="11430000" cy="5212080"/>
-          </a:xfrm>
-          <a:prstGeom prst="rect">
-            <a:avLst/>
-          </a:prstGeom>
-          <a:noFill/>
-        </p:spPr>
-        <p:txBody>
-          <a:bodyPr wrap="square">
-            <a:spAutoFit/>
-          </a:bodyPr>
-          <a:lstStyle/>
-          <a:p>
-            <a:pPr>
-              <a:spcBef>
-                <a:spcPts val="400"/>
-              </a:spcBef>
-            </a:pPr>
-            <a:r>
-              <a:rPr sz="1500">
-                <a:solidFill>
-                  <a:srgbClr val="003DA5"/>
-                </a:solidFill>
-                <a:latin typeface="Arial"/>
-              </a:rPr>
-              <a:t>▪  </a:t>
-            </a:r>
-            <a:r>
-              <a:rPr sz="1700">
-                <a:solidFill>
-                  <a:srgbClr val="1A1A1A"/>
-                </a:solidFill>
-                <a:latin typeface="Arial"/>
-              </a:rPr>
-              <a:t>Der Jahresabschluss beantwortet die Frage: „Wie ist die finanzielle Situation?". Diese Analyse ist die Grundlage des…</a:t>
-            </a:r>
-          </a:p>
-          <a:p>
-            <a:pPr>
-              <a:spcBef>
-                <a:spcPts val="400"/>
-              </a:spcBef>
-            </a:pPr>
-            <a:r>
-              <a:rPr sz="1500">
-                <a:solidFill>
-                  <a:srgbClr val="003DA5"/>
-                </a:solidFill>
-                <a:latin typeface="Arial"/>
-              </a:rPr>
-              <a:t>▪  </a:t>
-            </a:r>
-            <a:r>
-              <a:rPr sz="1700">
-                <a:solidFill>
-                  <a:srgbClr val="1A1A1A"/>
-                </a:solidFill>
-                <a:latin typeface="Arial"/>
-              </a:rPr>
-              <a:t>Eine Kennzahl allein erzählt keinen Kontext. Ein Unternehmen mit einer EK-Quote von 15 % kann sein: ein schnell…</a:t>
-            </a:r>
-          </a:p>
-          <a:p>
-            <a:pPr>
-              <a:spcBef>
-                <a:spcPts val="400"/>
-              </a:spcBef>
-            </a:pPr>
-            <a:r>
-              <a:rPr sz="1500">
-                <a:solidFill>
-                  <a:srgbClr val="003DA5"/>
-                </a:solidFill>
-                <a:latin typeface="Arial"/>
-              </a:rPr>
-              <a:t>▪  </a:t>
-            </a:r>
-            <a:r>
-              <a:rPr sz="1700">
-                <a:solidFill>
-                  <a:srgbClr val="1A1A1A"/>
-                </a:solidFill>
-                <a:latin typeface="Arial"/>
-              </a:rPr>
-              <a:t>Krecek (2019, S. 156) betont: „Die Bilanzanalyse muss in einem Gesprächsprozess mit dem Unternehmen eingebettet sein.…</a:t>
-            </a:r>
-          </a:p>
-        </p:txBody>
-      </p:sp>
-      <p:sp>
-        <p:nvSpPr>
-          <p:cNvPr id="6" name="TextBox 5"/>
-          <p:cNvSpPr txBox="1"/>
-          <p:nvPr/>
-        </p:nvSpPr>
-        <p:spPr>
-          <a:xfrm>
-            <a:off x="11704320" y="6492240"/>
-            <a:ext cx="365760" cy="274320"/>
-          </a:xfrm>
-          <a:prstGeom prst="rect">
-            <a:avLst/>
-          </a:prstGeom>
-          <a:noFill/>
-        </p:spPr>
-        <p:txBody>
-          <a:bodyPr wrap="square">
-            <a:spAutoFit/>
-          </a:bodyPr>
-          <a:lstStyle/>
-          <a:p>
-            <a:pPr algn="r"/>
-            <a:r>
-              <a:rPr sz="1000" b="0">
-                <a:solidFill>
-                  <a:srgbClr val="6B7280"/>
-                </a:solidFill>
-                <a:latin typeface="Arial"/>
-              </a:rPr>
-              <a:t>1</a:t>
+              <a:rPr sz="3600" b="1" i="0">
+                <a:solidFill>
+                  <a:srgbClr val="FFFFFF"/>
+                </a:solidFill>
+                <a:latin typeface="Arial"/>
+              </a:rPr>
+              <a:t>Theorie-Input: Vom Zahlenleser zum Gesprächsführer</a:t>
             </a:r>
           </a:p>
         </p:txBody>
@@ -4413,8 +5996,8 @@
         </p:nvSpPr>
         <p:spPr>
           <a:xfrm>
-            <a:off x="365760" y="274320"/>
-            <a:ext cx="11430000" cy="822960"/>
+            <a:off x="228600" y="182880"/>
+            <a:ext cx="11430000" cy="320040"/>
           </a:xfrm>
           <a:prstGeom prst="rect">
             <a:avLst/>
@@ -4429,33 +6012,68 @@
           <a:p>
             <a:pPr algn="l"/>
             <a:r>
-              <a:rPr sz="2200" b="1">
+              <a:rPr sz="900" b="0" i="0">
+                <a:solidFill>
+                  <a:srgbClr val="556575"/>
+                </a:solidFill>
+                <a:latin typeface="Arial"/>
+              </a:rPr>
+              <a:t>M02 · Modulinhalte</a:t>
+            </a:r>
+          </a:p>
+        </p:txBody>
+      </p:sp>
+      <p:sp>
+        <p:nvSpPr>
+          <p:cNvPr id="4" name="TextBox 3"/>
+          <p:cNvSpPr txBox="1"/>
+          <p:nvPr/>
+        </p:nvSpPr>
+        <p:spPr>
+          <a:xfrm>
+            <a:off x="365760" y="274320"/>
+            <a:ext cx="11430000" cy="777240"/>
+          </a:xfrm>
+          <a:prstGeom prst="rect">
+            <a:avLst/>
+          </a:prstGeom>
+          <a:noFill/>
+        </p:spPr>
+        <p:txBody>
+          <a:bodyPr wrap="square">
+            <a:spAutoFit/>
+          </a:bodyPr>
+          <a:lstStyle/>
+          <a:p>
+            <a:pPr algn="l"/>
+            <a:r>
+              <a:rPr sz="2200" b="1" i="0">
                 <a:solidFill>
                   <a:srgbClr val="003DA5"/>
                 </a:solidFill>
                 <a:latin typeface="Arial"/>
               </a:rPr>
-              <a:t>Kommunikation auf Augenhöhe: Inhalts- vs. Beziehungsebene</a:t>
-            </a:r>
-          </a:p>
-        </p:txBody>
-      </p:sp>
-      <p:sp>
-        <p:nvSpPr>
-          <p:cNvPr id="4" name="Rectangle 3"/>
+              <a:t>Die Grenzen der reinen Kennzahlenanalyse</a:t>
+            </a:r>
+          </a:p>
+        </p:txBody>
+      </p:sp>
+      <p:sp>
+        <p:nvSpPr>
+          <p:cNvPr id="5" name="Rectangle 4"/>
           <p:cNvSpPr/>
           <p:nvPr/>
         </p:nvSpPr>
         <p:spPr>
           <a:xfrm>
-            <a:off x="365760" y="1051560"/>
+            <a:off x="365760" y="1005840"/>
             <a:ext cx="11430000" cy="27432"/>
           </a:xfrm>
           <a:prstGeom prst="rect">
             <a:avLst/>
           </a:prstGeom>
           <a:solidFill>
-            <a:srgbClr val="E5E7EB"/>
+            <a:srgbClr val="D1D5DB"/>
           </a:solidFill>
           <a:ln>
             <a:noFill/>
@@ -4485,13 +6103,13 @@
       </p:sp>
       <p:sp>
         <p:nvSpPr>
-          <p:cNvPr id="5" name="TextBox 4"/>
+          <p:cNvPr id="6" name="TextBox 5"/>
           <p:cNvSpPr txBox="1"/>
           <p:nvPr/>
         </p:nvSpPr>
         <p:spPr>
           <a:xfrm>
-            <a:off x="365760" y="1234440"/>
+            <a:off x="365760" y="1143000"/>
             <a:ext cx="11430000" cy="5212080"/>
           </a:xfrm>
           <a:prstGeom prst="rect">
@@ -4507,7 +6125,7 @@
           <a:p>
             <a:pPr>
               <a:spcBef>
-                <a:spcPts val="400"/>
+                <a:spcPts val="500"/>
               </a:spcBef>
             </a:pPr>
             <a:r>
@@ -4526,13 +6144,13 @@
                 </a:solidFill>
                 <a:latin typeface="Arial"/>
               </a:rPr>
-              <a:t>Watzlawick, Beavin und Jackson (1967) zeigen: Jede Aussage enthält neben dem Sachinhalt eine Beziehungsbotschaft. Eine…</a:t>
+              <a:t>Der Jahresabschluss beantwortet die Frage: „Wie ist die finanzielle Situation?". Diese Analyse ist die Grundlage des Kreditgeschäfts – und gleichzeitig nur die…</a:t>
             </a:r>
           </a:p>
           <a:p>
             <a:pPr>
               <a:spcBef>
-                <a:spcPts val="400"/>
+                <a:spcPts val="500"/>
               </a:spcBef>
             </a:pPr>
             <a:r>
@@ -4551,42 +6169,32 @@
                 </a:solidFill>
                 <a:latin typeface="Arial"/>
               </a:rPr>
-              <a:t>Das Muster: Beobachtung + offene Frage statt Beobachtung + Bewertung.</a:t>
-            </a:r>
-          </a:p>
-        </p:txBody>
-      </p:sp>
-      <p:sp>
-        <p:nvSpPr>
-          <p:cNvPr id="6" name="TextBox 5"/>
-          <p:cNvSpPr txBox="1"/>
-          <p:nvPr/>
-        </p:nvSpPr>
-        <p:spPr>
-          <a:xfrm>
-            <a:off x="11704320" y="6492240"/>
-            <a:ext cx="365760" cy="274320"/>
-          </a:xfrm>
-          <a:prstGeom prst="rect">
-            <a:avLst/>
-          </a:prstGeom>
-          <a:noFill/>
-        </p:spPr>
-        <p:txBody>
-          <a:bodyPr wrap="square">
-            <a:spAutoFit/>
-          </a:bodyPr>
-          <a:lstStyle/>
-          <a:p>
-            <a:pPr algn="r"/>
-            <a:r>
-              <a:rPr sz="1000" b="0">
-                <a:solidFill>
-                  <a:srgbClr val="6B7280"/>
-                </a:solidFill>
-                <a:latin typeface="Arial"/>
-              </a:rPr>
-              <a:t>2</a:t>
+              <a:t>Eine Kennzahl allein erzählt keinen Kontext. Ein Unternehmen mit einer EK-Quote von 15 % kann sein: ein schnell wachsendes Unternehmen mit geplanter…</a:t>
+            </a:r>
+          </a:p>
+          <a:p>
+            <a:pPr>
+              <a:spcBef>
+                <a:spcPts val="500"/>
+              </a:spcBef>
+            </a:pPr>
+            <a:r>
+              <a:rPr sz="1500">
+                <a:solidFill>
+                  <a:srgbClr val="003DA5"/>
+                </a:solidFill>
+                <a:latin typeface="Arial"/>
+              </a:rPr>
+              <a:t>▪  </a:t>
+            </a:r>
+            <a:r>
+              <a:rPr sz="1700">
+                <a:solidFill>
+                  <a:srgbClr val="1A1A1A"/>
+                </a:solidFill>
+                <a:latin typeface="Arial"/>
+              </a:rPr>
+              <a:t>Krecek (2019, S. 156) betont: „Die Bilanzanalyse muss in einem Gesprächsprozess mit dem Unternehmen eingebettet sein. Nur so werden die qualitativen Faktoren…</a:t>
             </a:r>
           </a:p>
         </p:txBody>
@@ -4668,8 +6276,8 @@
         </p:nvSpPr>
         <p:spPr>
           <a:xfrm>
-            <a:off x="365760" y="274320"/>
-            <a:ext cx="11430000" cy="822960"/>
+            <a:off x="228600" y="182880"/>
+            <a:ext cx="11430000" cy="320040"/>
           </a:xfrm>
           <a:prstGeom prst="rect">
             <a:avLst/>
@@ -4684,33 +6292,68 @@
           <a:p>
             <a:pPr algn="l"/>
             <a:r>
-              <a:rPr sz="2200" b="1">
+              <a:rPr sz="900" b="0" i="0">
+                <a:solidFill>
+                  <a:srgbClr val="556575"/>
+                </a:solidFill>
+                <a:latin typeface="Arial"/>
+              </a:rPr>
+              <a:t>M02 · Modulinhalte</a:t>
+            </a:r>
+          </a:p>
+        </p:txBody>
+      </p:sp>
+      <p:sp>
+        <p:nvSpPr>
+          <p:cNvPr id="4" name="TextBox 3"/>
+          <p:cNvSpPr txBox="1"/>
+          <p:nvPr/>
+        </p:nvSpPr>
+        <p:spPr>
+          <a:xfrm>
+            <a:off x="365760" y="274320"/>
+            <a:ext cx="11430000" cy="777240"/>
+          </a:xfrm>
+          <a:prstGeom prst="rect">
+            <a:avLst/>
+          </a:prstGeom>
+          <a:noFill/>
+        </p:spPr>
+        <p:txBody>
+          <a:bodyPr wrap="square">
+            <a:spAutoFit/>
+          </a:bodyPr>
+          <a:lstStyle/>
+          <a:p>
+            <a:pPr algn="l"/>
+            <a:r>
+              <a:rPr sz="2200" b="1" i="0">
                 <a:solidFill>
                   <a:srgbClr val="003DA5"/>
                 </a:solidFill>
                 <a:latin typeface="Arial"/>
               </a:rPr>
-              <a:t>Der 5-Phasen-Rahmen für das Bilanzgespräch</a:t>
-            </a:r>
-          </a:p>
-        </p:txBody>
-      </p:sp>
-      <p:sp>
-        <p:nvSpPr>
-          <p:cNvPr id="4" name="Rectangle 3"/>
+              <a:t>Kommunikation auf Augenhöhe: Inhalts- vs. Beziehungsebene</a:t>
+            </a:r>
+          </a:p>
+        </p:txBody>
+      </p:sp>
+      <p:sp>
+        <p:nvSpPr>
+          <p:cNvPr id="5" name="Rectangle 4"/>
           <p:cNvSpPr/>
           <p:nvPr/>
         </p:nvSpPr>
         <p:spPr>
           <a:xfrm>
-            <a:off x="365760" y="1051560"/>
+            <a:off x="365760" y="1005840"/>
             <a:ext cx="11430000" cy="27432"/>
           </a:xfrm>
           <a:prstGeom prst="rect">
             <a:avLst/>
           </a:prstGeom>
           <a:solidFill>
-            <a:srgbClr val="E5E7EB"/>
+            <a:srgbClr val="D1D5DB"/>
           </a:solidFill>
           <a:ln>
             <a:noFill/>
@@ -4738,214 +6381,305 @@
           </a:p>
         </p:txBody>
       </p:sp>
-      <p:sp>
-        <p:nvSpPr>
-          <p:cNvPr id="5" name="TextBox 4"/>
-          <p:cNvSpPr txBox="1"/>
+      <p:graphicFrame>
+        <p:nvGraphicFramePr>
+          <p:cNvPr id="6" name="Table 5"/>
+          <p:cNvGraphicFramePr>
+            <a:graphicFrameLocks noGrp="1"/>
+          </p:cNvGraphicFramePr>
           <p:nvPr/>
-        </p:nvSpPr>
-        <p:spPr>
-          <a:xfrm>
-            <a:off x="365760" y="1234440"/>
-            <a:ext cx="11430000" cy="5212080"/>
-          </a:xfrm>
-          <a:prstGeom prst="rect">
-            <a:avLst/>
-          </a:prstGeom>
-          <a:noFill/>
-        </p:spPr>
-        <p:txBody>
-          <a:bodyPr wrap="square">
-            <a:spAutoFit/>
-          </a:bodyPr>
-          <a:lstStyle/>
-          <a:p>
-            <a:pPr>
-              <a:spcBef>
-                <a:spcPts val="400"/>
-              </a:spcBef>
-            </a:pPr>
-            <a:r>
-              <a:rPr sz="1500">
-                <a:solidFill>
-                  <a:srgbClr val="003DA5"/>
-                </a:solidFill>
-                <a:latin typeface="Arial"/>
-              </a:rPr>
-              <a:t>▪  </a:t>
-            </a:r>
-            <a:r>
-              <a:rPr sz="1700">
-                <a:solidFill>
-                  <a:srgbClr val="1A1A1A"/>
-                </a:solidFill>
-                <a:latin typeface="Arial"/>
-              </a:rPr>
-              <a:t>Mindestens 4 Kennzahlen berechnen (EK-Quote, Liquidität, Verschuldungsgrad, EBIT-Marge)</a:t>
-            </a:r>
-          </a:p>
-          <a:p>
-            <a:pPr>
-              <a:spcBef>
-                <a:spcPts val="400"/>
-              </a:spcBef>
-            </a:pPr>
-            <a:r>
-              <a:rPr sz="1500">
-                <a:solidFill>
-                  <a:srgbClr val="003DA5"/>
-                </a:solidFill>
-                <a:latin typeface="Arial"/>
-              </a:rPr>
-              <a:t>▪  </a:t>
-            </a:r>
-            <a:r>
-              <a:rPr sz="1700">
-                <a:solidFill>
-                  <a:srgbClr val="1A1A1A"/>
-                </a:solidFill>
-                <a:latin typeface="Arial"/>
-              </a:rPr>
-              <a:t>Zeitreihe: Vergleich zu mindestens 2 Vorjahren</a:t>
-            </a:r>
-          </a:p>
-          <a:p>
-            <a:pPr>
-              <a:spcBef>
-                <a:spcPts val="400"/>
-              </a:spcBef>
-            </a:pPr>
-            <a:r>
-              <a:rPr sz="1500">
-                <a:solidFill>
-                  <a:srgbClr val="003DA5"/>
-                </a:solidFill>
-                <a:latin typeface="Arial"/>
-              </a:rPr>
-              <a:t>▪  </a:t>
-            </a:r>
-            <a:r>
-              <a:rPr sz="1700">
-                <a:solidFill>
-                  <a:srgbClr val="1A1A1A"/>
-                </a:solidFill>
-                <a:latin typeface="Arial"/>
-              </a:rPr>
-              <a:t>Branchenwert recherchieren: In agree (Firmenkundenanalyse) stehen aktuelle Branchenbenchmarks aus der Creditreform/Bisnode-Lizenz direkt im Analysebogen – diese Werte für das Gespräch bevorzugen. Alternativ: Bundesbank Unternehmensabschlussstatistik (kostenfrei, aber teils 2 Jahre zeitverzögert)</a:t>
-            </a:r>
-          </a:p>
-          <a:p>
-            <a:pPr>
-              <a:spcBef>
-                <a:spcPts val="400"/>
-              </a:spcBef>
-            </a:pPr>
-            <a:r>
-              <a:rPr sz="1500">
-                <a:solidFill>
-                  <a:srgbClr val="003DA5"/>
-                </a:solidFill>
-                <a:latin typeface="Arial"/>
-              </a:rPr>
-              <a:t>▪  </a:t>
-            </a:r>
-            <a:r>
-              <a:rPr sz="1700">
-                <a:solidFill>
-                  <a:srgbClr val="1A1A1A"/>
-                </a:solidFill>
-                <a:latin typeface="Arial"/>
-              </a:rPr>
-              <a:t>3 Schlüsselbotschaften + 5 offene Fragen schriftlich vorbereiten</a:t>
-            </a:r>
-          </a:p>
-          <a:p>
-            <a:pPr>
-              <a:spcBef>
-                <a:spcPts val="400"/>
-              </a:spcBef>
-            </a:pPr>
-            <a:r>
-              <a:rPr sz="1500">
-                <a:solidFill>
-                  <a:srgbClr val="003DA5"/>
-                </a:solidFill>
-                <a:latin typeface="Arial"/>
-              </a:rPr>
-              <a:t>▪  </a:t>
-            </a:r>
-            <a:r>
-              <a:rPr sz="1700">
-                <a:solidFill>
-                  <a:srgbClr val="1A1A1A"/>
-                </a:solidFill>
-                <a:latin typeface="Arial"/>
-              </a:rPr>
-              <a:t>Kontext und Ziel setzen: „Heute möchte ich mit Ihnen Ihren Jahresabschluss durchgehen und verstehen, wie sich Ihre Lage entwickelt hat."</a:t>
-            </a:r>
-          </a:p>
-          <a:p>
-            <a:pPr>
-              <a:spcBef>
-                <a:spcPts val="400"/>
-              </a:spcBef>
-            </a:pPr>
-            <a:r>
-              <a:rPr sz="1500">
-                <a:solidFill>
-                  <a:srgbClr val="003DA5"/>
-                </a:solidFill>
-                <a:latin typeface="Arial"/>
-              </a:rPr>
-              <a:t>▪  </a:t>
-            </a:r>
-            <a:r>
-              <a:rPr sz="1700">
-                <a:solidFill>
-                  <a:srgbClr val="1A1A1A"/>
-                </a:solidFill>
-                <a:latin typeface="Arial"/>
-              </a:rPr>
-              <a:t>Struktur ankündigen: „Ich stelle die wichtigsten Kennzahlen vor, interessiere mich aber vor allem für Ihre Einschätzung dazu."</a:t>
-            </a:r>
-          </a:p>
-        </p:txBody>
-      </p:sp>
-      <p:sp>
-        <p:nvSpPr>
-          <p:cNvPr id="6" name="TextBox 5"/>
-          <p:cNvSpPr txBox="1"/>
-          <p:nvPr/>
-        </p:nvSpPr>
-        <p:spPr>
-          <a:xfrm>
-            <a:off x="11704320" y="6492240"/>
-            <a:ext cx="365760" cy="274320"/>
-          </a:xfrm>
-          <a:prstGeom prst="rect">
-            <a:avLst/>
-          </a:prstGeom>
-          <a:noFill/>
-        </p:spPr>
-        <p:txBody>
-          <a:bodyPr wrap="square">
-            <a:spAutoFit/>
-          </a:bodyPr>
-          <a:lstStyle/>
-          <a:p>
-            <a:pPr algn="r"/>
-            <a:r>
-              <a:rPr sz="1000" b="0">
-                <a:solidFill>
-                  <a:srgbClr val="6B7280"/>
-                </a:solidFill>
-                <a:latin typeface="Arial"/>
-              </a:rPr>
-              <a:t>3</a:t>
-            </a:r>
-          </a:p>
-        </p:txBody>
-      </p:sp>
+        </p:nvGraphicFramePr>
+        <p:xfrm>
+          <a:off x="365760" y="1143000"/>
+          <a:ext cx="11430000" cy="1901952"/>
+        </p:xfrm>
+        <a:graphic>
+          <a:graphicData uri="http://schemas.openxmlformats.org/drawingml/2006/table">
+            <a:tbl>
+              <a:tblPr firstRow="1" bandRow="1">
+                <a:tableStyleId>{5C22544A-7EE6-4342-B048-85BDC9FD1C3A}</a:tableStyleId>
+              </a:tblPr>
+              <a:tblGrid>
+                <a:gridCol w="3810000"/>
+                <a:gridCol w="3810000"/>
+                <a:gridCol w="3810000"/>
+              </a:tblGrid>
+              <a:tr h="475488">
+                <a:tc>
+                  <a:txBody>
+                    <a:bodyPr wrap="square"/>
+                    <a:lstStyle/>
+                    <a:p>
+                      <a:r>
+                        <a:rPr sz="1100" b="1">
+                          <a:solidFill>
+                            <a:srgbClr val="FFFFFF"/>
+                          </a:solidFill>
+                          <a:latin typeface="Arial"/>
+                        </a:rPr>
+                        <a:t>Thema</a:t>
+                      </a:r>
+                    </a:p>
+                  </a:txBody>
+                  <a:tcPr>
+                    <a:solidFill>
+                      <a:srgbClr val="003DA5"/>
+                    </a:solidFill>
+                  </a:tcPr>
+                </a:tc>
+                <a:tc>
+                  <a:txBody>
+                    <a:bodyPr wrap="square"/>
+                    <a:lstStyle/>
+                    <a:p>
+                      <a:r>
+                        <a:rPr sz="1100" b="1">
+                          <a:solidFill>
+                            <a:srgbClr val="FFFFFF"/>
+                          </a:solidFill>
+                          <a:latin typeface="Arial"/>
+                        </a:rPr>
+                        <a:t>Belehrend (Abwehr provoziert)</a:t>
+                      </a:r>
+                    </a:p>
+                  </a:txBody>
+                  <a:tcPr>
+                    <a:solidFill>
+                      <a:srgbClr val="003DA5"/>
+                    </a:solidFill>
+                  </a:tcPr>
+                </a:tc>
+                <a:tc>
+                  <a:txBody>
+                    <a:bodyPr wrap="square"/>
+                    <a:lstStyle/>
+                    <a:p>
+                      <a:r>
+                        <a:rPr sz="1100" b="1">
+                          <a:solidFill>
+                            <a:srgbClr val="FFFFFF"/>
+                          </a:solidFill>
+                          <a:latin typeface="Arial"/>
+                        </a:rPr>
+                        <a:t>Fragend (Dialog öffnet)</a:t>
+                      </a:r>
+                    </a:p>
+                  </a:txBody>
+                  <a:tcPr>
+                    <a:solidFill>
+                      <a:srgbClr val="003DA5"/>
+                    </a:solidFill>
+                  </a:tcPr>
+                </a:tc>
+              </a:tr>
+              <a:tr h="475488">
+                <a:tc>
+                  <a:txBody>
+                    <a:bodyPr wrap="square"/>
+                    <a:lstStyle/>
+                    <a:p>
+                      <a:r>
+                        <a:rPr sz="1100" b="0">
+                          <a:solidFill>
+                            <a:srgbClr val="1A1A1A"/>
+                          </a:solidFill>
+                          <a:latin typeface="Arial"/>
+                        </a:rPr>
+                        <a:t>EK-Quote sinkt</a:t>
+                      </a:r>
+                    </a:p>
+                  </a:txBody>
+                  <a:tcPr>
+                    <a:solidFill>
+                      <a:srgbClr val="FFFFFF"/>
+                    </a:solidFill>
+                  </a:tcPr>
+                </a:tc>
+                <a:tc>
+                  <a:txBody>
+                    <a:bodyPr wrap="square"/>
+                    <a:lstStyle/>
+                    <a:p>
+                      <a:r>
+                        <a:rPr sz="1100" b="0">
+                          <a:solidFill>
+                            <a:srgbClr val="1A1A1A"/>
+                          </a:solidFill>
+                          <a:latin typeface="Arial"/>
+                        </a:rPr>
+                        <a:t>„Ihre EK-Quote ist viel zu niedrig."</a:t>
+                      </a:r>
+                    </a:p>
+                  </a:txBody>
+                  <a:tcPr>
+                    <a:solidFill>
+                      <a:srgbClr val="FFFFFF"/>
+                    </a:solidFill>
+                  </a:tcPr>
+                </a:tc>
+                <a:tc>
+                  <a:txBody>
+                    <a:bodyPr wrap="square"/>
+                    <a:lstStyle/>
+                    <a:p>
+                      <a:r>
+                        <a:rPr sz="1100" b="0">
+                          <a:solidFill>
+                            <a:srgbClr val="1A1A1A"/>
+                          </a:solidFill>
+                          <a:latin typeface="Arial"/>
+                        </a:rPr>
+                        <a:t>„Ich sehe, dass die EK-Quote von 22 % auf 15 % gefallen ist. Wie erklären Sie sich das?"</a:t>
+                      </a:r>
+                    </a:p>
+                  </a:txBody>
+                  <a:tcPr>
+                    <a:solidFill>
+                      <a:srgbClr val="FFFFFF"/>
+                    </a:solidFill>
+                  </a:tcPr>
+                </a:tc>
+              </a:tr>
+              <a:tr h="475488">
+                <a:tc>
+                  <a:txBody>
+                    <a:bodyPr wrap="square"/>
+                    <a:lstStyle/>
+                    <a:p>
+                      <a:r>
+                        <a:rPr sz="1100" b="0">
+                          <a:solidFill>
+                            <a:srgbClr val="1A1A1A"/>
+                          </a:solidFill>
+                          <a:latin typeface="Arial"/>
+                        </a:rPr>
+                        <a:t>Liquidität kritisch</a:t>
+                      </a:r>
+                    </a:p>
+                  </a:txBody>
+                  <a:tcPr>
+                    <a:solidFill>
+                      <a:srgbClr val="F4F6FA"/>
+                    </a:solidFill>
+                  </a:tcPr>
+                </a:tc>
+                <a:tc>
+                  <a:txBody>
+                    <a:bodyPr wrap="square"/>
+                    <a:lstStyle/>
+                    <a:p>
+                      <a:r>
+                        <a:rPr sz="1100" b="0">
+                          <a:solidFill>
+                            <a:srgbClr val="1A1A1A"/>
+                          </a:solidFill>
+                          <a:latin typeface="Arial"/>
+                        </a:rPr>
+                        <a:t>„Sie haben ein Liquiditätsproblem."</a:t>
+                      </a:r>
+                    </a:p>
+                  </a:txBody>
+                  <a:tcPr>
+                    <a:solidFill>
+                      <a:srgbClr val="F4F6FA"/>
+                    </a:solidFill>
+                  </a:tcPr>
+                </a:tc>
+                <a:tc>
+                  <a:txBody>
+                    <a:bodyPr wrap="square"/>
+                    <a:lstStyle/>
+                    <a:p>
+                      <a:r>
+                        <a:rPr sz="1100" b="0">
+                          <a:solidFill>
+                            <a:srgbClr val="1A1A1A"/>
+                          </a:solidFill>
+                          <a:latin typeface="Arial"/>
+                        </a:rPr>
+                        <a:t>„Ihre liquiden Mittel sind deutlich gesunken. Ist das beabsichtigt – z. B. durch eine Investition?"</a:t>
+                      </a:r>
+                    </a:p>
+                  </a:txBody>
+                  <a:tcPr>
+                    <a:solidFill>
+                      <a:srgbClr val="F4F6FA"/>
+                    </a:solidFill>
+                  </a:tcPr>
+                </a:tc>
+              </a:tr>
+              <a:tr h="475488">
+                <a:tc>
+                  <a:txBody>
+                    <a:bodyPr wrap="square"/>
+                    <a:lstStyle/>
+                    <a:p>
+                      <a:r>
+                        <a:rPr sz="1100" b="0">
+                          <a:solidFill>
+                            <a:srgbClr val="1A1A1A"/>
+                          </a:solidFill>
+                          <a:latin typeface="Arial"/>
+                        </a:rPr>
+                        <a:t>Verschuldung hoch</a:t>
+                      </a:r>
+                    </a:p>
+                  </a:txBody>
+                  <a:tcPr>
+                    <a:solidFill>
+                      <a:srgbClr val="FFFFFF"/>
+                    </a:solidFill>
+                  </a:tcPr>
+                </a:tc>
+                <a:tc>
+                  <a:txBody>
+                    <a:bodyPr wrap="square"/>
+                    <a:lstStyle/>
+                    <a:p>
+                      <a:r>
+                        <a:rPr sz="1100" b="0">
+                          <a:solidFill>
+                            <a:srgbClr val="1A1A1A"/>
+                          </a:solidFill>
+                          <a:latin typeface="Arial"/>
+                        </a:rPr>
+                        <a:t>„Sie sind viel zu verschuldet."</a:t>
+                      </a:r>
+                    </a:p>
+                  </a:txBody>
+                  <a:tcPr>
+                    <a:solidFill>
+                      <a:srgbClr val="FFFFFF"/>
+                    </a:solidFill>
+                  </a:tcPr>
+                </a:tc>
+                <a:tc>
+                  <a:txBody>
+                    <a:bodyPr wrap="square"/>
+                    <a:lstStyle/>
+                    <a:p>
+                      <a:r>
+                        <a:rPr sz="1100" b="0">
+                          <a:solidFill>
+                            <a:srgbClr val="1A1A1A"/>
+                          </a:solidFill>
+                          <a:latin typeface="Arial"/>
+                        </a:rPr>
+                        <a:t>„Die Fremdkapitalquote hat sich erhöht. Entspricht das Ihrer Finanzierungsstrategie?"</a:t>
+                      </a:r>
+                    </a:p>
+                  </a:txBody>
+                  <a:tcPr>
+                    <a:solidFill>
+                      <a:srgbClr val="FFFFFF"/>
+                    </a:solidFill>
+                  </a:tcPr>
+                </a:tc>
+              </a:tr>
+            </a:tbl>
+          </a:graphicData>
+        </a:graphic>
+      </p:graphicFrame>
     </p:spTree>
   </p:cSld>
   <p:clrMapOvr>
@@ -5023,8 +6757,8 @@
         </p:nvSpPr>
         <p:spPr>
           <a:xfrm>
-            <a:off x="365760" y="274320"/>
-            <a:ext cx="11430000" cy="822960"/>
+            <a:off x="228600" y="182880"/>
+            <a:ext cx="11430000" cy="320040"/>
           </a:xfrm>
           <a:prstGeom prst="rect">
             <a:avLst/>
@@ -5039,33 +6773,68 @@
           <a:p>
             <a:pPr algn="l"/>
             <a:r>
-              <a:rPr sz="2200" b="1">
+              <a:rPr sz="900" b="0" i="0">
+                <a:solidFill>
+                  <a:srgbClr val="556575"/>
+                </a:solidFill>
+                <a:latin typeface="Arial"/>
+              </a:rPr>
+              <a:t>M02 · Modulinhalte</a:t>
+            </a:r>
+          </a:p>
+        </p:txBody>
+      </p:sp>
+      <p:sp>
+        <p:nvSpPr>
+          <p:cNvPr id="4" name="TextBox 3"/>
+          <p:cNvSpPr txBox="1"/>
+          <p:nvPr/>
+        </p:nvSpPr>
+        <p:spPr>
+          <a:xfrm>
+            <a:off x="365760" y="274320"/>
+            <a:ext cx="11430000" cy="777240"/>
+          </a:xfrm>
+          <a:prstGeom prst="rect">
+            <a:avLst/>
+          </a:prstGeom>
+          <a:noFill/>
+        </p:spPr>
+        <p:txBody>
+          <a:bodyPr wrap="square">
+            <a:spAutoFit/>
+          </a:bodyPr>
+          <a:lstStyle/>
+          <a:p>
+            <a:pPr algn="l"/>
+            <a:r>
+              <a:rPr sz="2200" b="1" i="0">
                 <a:solidFill>
                   <a:srgbClr val="003DA5"/>
                 </a:solidFill>
                 <a:latin typeface="Arial"/>
               </a:rPr>
-              <a:t>Beobachtungsbogen Rollenspiel</a:t>
-            </a:r>
-          </a:p>
-        </p:txBody>
-      </p:sp>
-      <p:sp>
-        <p:nvSpPr>
-          <p:cNvPr id="4" name="Rectangle 3"/>
+              <a:t>Der 5-Phasen-Rahmen für das Bilanzgespräch</a:t>
+            </a:r>
+          </a:p>
+        </p:txBody>
+      </p:sp>
+      <p:sp>
+        <p:nvSpPr>
+          <p:cNvPr id="5" name="Rectangle 4"/>
           <p:cNvSpPr/>
           <p:nvPr/>
         </p:nvSpPr>
         <p:spPr>
           <a:xfrm>
-            <a:off x="365760" y="1051560"/>
+            <a:off x="365760" y="1005840"/>
             <a:ext cx="11430000" cy="27432"/>
           </a:xfrm>
           <a:prstGeom prst="rect">
             <a:avLst/>
           </a:prstGeom>
           <a:solidFill>
-            <a:srgbClr val="E5E7EB"/>
+            <a:srgbClr val="D1D5DB"/>
           </a:solidFill>
           <a:ln>
             <a:noFill/>
@@ -5095,13 +6864,13 @@
       </p:sp>
       <p:sp>
         <p:nvSpPr>
-          <p:cNvPr id="5" name="TextBox 4"/>
+          <p:cNvPr id="6" name="TextBox 5"/>
           <p:cNvSpPr txBox="1"/>
           <p:nvPr/>
         </p:nvSpPr>
         <p:spPr>
           <a:xfrm>
-            <a:off x="365760" y="1234440"/>
+            <a:off x="365760" y="1143000"/>
             <a:ext cx="11430000" cy="5212080"/>
           </a:xfrm>
           <a:prstGeom prst="rect">
@@ -5117,7 +6886,7 @@
           <a:p>
             <a:pPr>
               <a:spcBef>
-                <a:spcPts val="400"/>
+                <a:spcPts val="500"/>
               </a:spcBef>
             </a:pPr>
             <a:r>
@@ -5130,48 +6899,158 @@
               <a:t>▪  </a:t>
             </a:r>
             <a:r>
+              <a:rPr sz="1700" b="1">
+                <a:solidFill>
+                  <a:srgbClr val="003DA5"/>
+                </a:solidFill>
+                <a:latin typeface="Arial"/>
+              </a:rPr>
+              <a:t>Phase 1 – Vorbereitung: </a:t>
+            </a:r>
+            <a:r>
               <a:rPr sz="1700">
                 <a:solidFill>
                   <a:srgbClr val="1A1A1A"/>
                 </a:solidFill>
                 <a:latin typeface="Arial"/>
               </a:rPr>
-              <a:t>Skala: 1 = gar nicht sichtbar · 3 = ansatzweise · 5 = sehr gut</a:t>
-            </a:r>
-          </a:p>
-        </p:txBody>
-      </p:sp>
-      <p:sp>
-        <p:nvSpPr>
-          <p:cNvPr id="6" name="TextBox 5"/>
-          <p:cNvSpPr txBox="1"/>
-          <p:nvPr/>
-        </p:nvSpPr>
-        <p:spPr>
-          <a:xfrm>
-            <a:off x="11704320" y="6492240"/>
-            <a:ext cx="365760" cy="274320"/>
-          </a:xfrm>
-          <a:prstGeom prst="rect">
-            <a:avLst/>
-          </a:prstGeom>
-          <a:noFill/>
-        </p:spPr>
-        <p:txBody>
-          <a:bodyPr wrap="square">
-            <a:spAutoFit/>
-          </a:bodyPr>
-          <a:lstStyle/>
-          <a:p>
-            <a:pPr algn="r"/>
-            <a:r>
-              <a:rPr sz="1000" b="0">
-                <a:solidFill>
-                  <a:srgbClr val="6B7280"/>
-                </a:solidFill>
-                <a:latin typeface="Arial"/>
-              </a:rPr>
-              <a:t>4</a:t>
+              <a:t>(30–45 Min. vor dem Termin) - Mindestens 4 Kennzahlen berechnen (EK-Quote, Liquidität, Verschuldungsgrad, EBIT-Marge) - Zeitreihe: Vergleich zu mindestens 2 Vorjahren -…</a:t>
+            </a:r>
+          </a:p>
+          <a:p>
+            <a:pPr>
+              <a:spcBef>
+                <a:spcPts val="500"/>
+              </a:spcBef>
+            </a:pPr>
+            <a:r>
+              <a:rPr sz="1500">
+                <a:solidFill>
+                  <a:srgbClr val="003DA5"/>
+                </a:solidFill>
+                <a:latin typeface="Arial"/>
+              </a:rPr>
+              <a:t>▪  </a:t>
+            </a:r>
+            <a:r>
+              <a:rPr sz="1700" b="1">
+                <a:solidFill>
+                  <a:srgbClr val="003DA5"/>
+                </a:solidFill>
+                <a:latin typeface="Arial"/>
+              </a:rPr>
+              <a:t>Phase 2 – Eröffnung: </a:t>
+            </a:r>
+            <a:r>
+              <a:rPr sz="1700">
+                <a:solidFill>
+                  <a:srgbClr val="1A1A1A"/>
+                </a:solidFill>
+                <a:latin typeface="Arial"/>
+              </a:rPr>
+              <a:t>(ca. 10 Min.) - Kontext und Ziel setzen: „Heute möchte ich mit Ihnen Ihren Jahresabschluss durchgehen und verstehen, wie sich Ihre Lage entwickelt hat." - Struktur ankündigen:…</a:t>
+            </a:r>
+          </a:p>
+          <a:p>
+            <a:pPr>
+              <a:spcBef>
+                <a:spcPts val="500"/>
+              </a:spcBef>
+            </a:pPr>
+            <a:r>
+              <a:rPr sz="1500">
+                <a:solidFill>
+                  <a:srgbClr val="003DA5"/>
+                </a:solidFill>
+                <a:latin typeface="Arial"/>
+              </a:rPr>
+              <a:t>▪  </a:t>
+            </a:r>
+            <a:r>
+              <a:rPr sz="1700" b="1">
+                <a:solidFill>
+                  <a:srgbClr val="003DA5"/>
+                </a:solidFill>
+                <a:latin typeface="Arial"/>
+              </a:rPr>
+              <a:t>Phase 3 – Analyse-Dialog: </a:t>
+            </a:r>
+            <a:r>
+              <a:rPr sz="1700">
+                <a:solidFill>
+                  <a:srgbClr val="1A1A1A"/>
+                </a:solidFill>
+                <a:latin typeface="Arial"/>
+              </a:rPr>
+              <a:t>(ca. 75 Min. im Workshop-Setting — Herzstück) Grundstruktur:</a:t>
+            </a:r>
+          </a:p>
+          <a:p>
+            <a:pPr>
+              <a:spcBef>
+                <a:spcPts val="500"/>
+              </a:spcBef>
+            </a:pPr>
+            <a:r>
+              <a:rPr sz="1500">
+                <a:solidFill>
+                  <a:srgbClr val="003DA5"/>
+                </a:solidFill>
+                <a:latin typeface="Arial"/>
+              </a:rPr>
+              <a:t>▪  </a:t>
+            </a:r>
+            <a:r>
+              <a:rPr sz="1700" b="1">
+                <a:solidFill>
+                  <a:srgbClr val="003DA5"/>
+                </a:solidFill>
+                <a:latin typeface="Arial"/>
+              </a:rPr>
+              <a:t>Praxishinweis: </a:t>
+            </a:r>
+            <a:r>
+              <a:rPr sz="1700">
+                <a:solidFill>
+                  <a:srgbClr val="1A1A1A"/>
+                </a:solidFill>
+                <a:latin typeface="Arial"/>
+              </a:rPr>
+              <a:t>Die 180-Minuten-Struktur dieses Moduls ist ein Übungsformat für den Seminarraum, keine Vorlage für den echten Kundentermin. Im realen Gespräch vor Ort gilt eine Gesamtdauer von…</a:t>
+            </a:r>
+          </a:p>
+          <a:p>
+            <a:pPr>
+              <a:spcBef>
+                <a:spcPts val="500"/>
+              </a:spcBef>
+            </a:pPr>
+            <a:r>
+              <a:rPr sz="1500">
+                <a:solidFill>
+                  <a:srgbClr val="003DA5"/>
+                </a:solidFill>
+                <a:latin typeface="Arial"/>
+              </a:rPr>
+              <a:t>▪  </a:t>
+            </a:r>
+            <a:r>
+              <a:rPr sz="1700" b="1">
+                <a:solidFill>
+                  <a:srgbClr val="003DA5"/>
+                </a:solidFill>
+                <a:latin typeface="Arial"/>
+              </a:rPr>
+              <a:t>Phase 4 – Beratungsimpulse: </a:t>
+            </a:r>
+            <a:r>
+              <a:rPr sz="1700">
+                <a:solidFill>
+                  <a:srgbClr val="1A1A1A"/>
+                </a:solidFill>
+                <a:latin typeface="Arial"/>
+              </a:rPr>
+              <a:t>(ca. 30 Min.) Aus Erkenntnissen konkrete Optionen ableiten — immer aus der Analyse heraus: - Liquiditätsrisiko → Kontokorrent-Kreditlinie erhöhen oder Betriebsmittelkredit (VR-…</a:t>
             </a:r>
           </a:p>
         </p:txBody>
@@ -5190,7 +7069,7 @@
     <p:bg>
       <p:bgPr>
         <a:solidFill>
-          <a:srgbClr val="1A1A1A"/>
+          <a:srgbClr val="FFFFFF"/>
         </a:solidFill>
         <a:effectLst/>
       </p:bgPr>
@@ -5217,7 +7096,7 @@
             <a:avLst/>
           </a:prstGeom>
           <a:solidFill>
-            <a:srgbClr val="E05B00"/>
+            <a:srgbClr val="003DA5"/>
           </a:solidFill>
           <a:ln>
             <a:noFill/>
@@ -5253,8 +7132,8 @@
         </p:nvSpPr>
         <p:spPr>
           <a:xfrm>
-            <a:off x="365760" y="2286000"/>
-            <a:ext cx="11430000" cy="1828800"/>
+            <a:off x="228600" y="182880"/>
+            <a:ext cx="11430000" cy="320040"/>
           </a:xfrm>
           <a:prstGeom prst="rect">
             <a:avLst/>
@@ -5269,13 +7148,148 @@
           <a:p>
             <a:pPr algn="l"/>
             <a:r>
-              <a:rPr sz="3600" b="1">
-                <a:solidFill>
-                  <a:srgbClr val="FFFFFF"/>
-                </a:solidFill>
-                <a:latin typeface="Arial"/>
-              </a:rPr>
-              <a:t>Checkliste: Bilanzgespräch vorbereiten</a:t>
+              <a:rPr sz="900" b="0" i="0">
+                <a:solidFill>
+                  <a:srgbClr val="556575"/>
+                </a:solidFill>
+                <a:latin typeface="Arial"/>
+              </a:rPr>
+              <a:t>M02 · Modulinhalte</a:t>
+            </a:r>
+          </a:p>
+        </p:txBody>
+      </p:sp>
+      <p:sp>
+        <p:nvSpPr>
+          <p:cNvPr id="4" name="TextBox 3"/>
+          <p:cNvSpPr txBox="1"/>
+          <p:nvPr/>
+        </p:nvSpPr>
+        <p:spPr>
+          <a:xfrm>
+            <a:off x="365760" y="274320"/>
+            <a:ext cx="11430000" cy="777240"/>
+          </a:xfrm>
+          <a:prstGeom prst="rect">
+            <a:avLst/>
+          </a:prstGeom>
+          <a:noFill/>
+        </p:spPr>
+        <p:txBody>
+          <a:bodyPr wrap="square">
+            <a:spAutoFit/>
+          </a:bodyPr>
+          <a:lstStyle/>
+          <a:p>
+            <a:pPr algn="l"/>
+            <a:r>
+              <a:rPr sz="2200" b="1" i="0">
+                <a:solidFill>
+                  <a:srgbClr val="003DA5"/>
+                </a:solidFill>
+                <a:latin typeface="Arial"/>
+              </a:rPr>
+              <a:t>Der 5-Phasen-Rahmen für das Bilanzgespräch</a:t>
+            </a:r>
+          </a:p>
+        </p:txBody>
+      </p:sp>
+      <p:sp>
+        <p:nvSpPr>
+          <p:cNvPr id="5" name="Rectangle 4"/>
+          <p:cNvSpPr/>
+          <p:nvPr/>
+        </p:nvSpPr>
+        <p:spPr>
+          <a:xfrm>
+            <a:off x="365760" y="1005840"/>
+            <a:ext cx="11430000" cy="27432"/>
+          </a:xfrm>
+          <a:prstGeom prst="rect">
+            <a:avLst/>
+          </a:prstGeom>
+          <a:solidFill>
+            <a:srgbClr val="D1D5DB"/>
+          </a:solidFill>
+          <a:ln>
+            <a:noFill/>
+          </a:ln>
+        </p:spPr>
+        <p:style>
+          <a:lnRef idx="1">
+            <a:schemeClr val="accent1"/>
+          </a:lnRef>
+          <a:fillRef idx="3">
+            <a:schemeClr val="accent1"/>
+          </a:fillRef>
+          <a:effectRef idx="2">
+            <a:schemeClr val="accent1"/>
+          </a:effectRef>
+          <a:fontRef idx="minor">
+            <a:schemeClr val="lt1"/>
+          </a:fontRef>
+        </p:style>
+        <p:txBody>
+          <a:bodyPr rtlCol="0" anchor="ctr"/>
+          <a:lstStyle/>
+          <a:p>
+            <a:pPr algn="ctr"/>
+          </a:p>
+        </p:txBody>
+      </p:sp>
+      <p:sp>
+        <p:nvSpPr>
+          <p:cNvPr id="6" name="TextBox 5"/>
+          <p:cNvSpPr txBox="1"/>
+          <p:nvPr/>
+        </p:nvSpPr>
+        <p:spPr>
+          <a:xfrm>
+            <a:off x="365760" y="1143000"/>
+            <a:ext cx="11430000" cy="5212080"/>
+          </a:xfrm>
+          <a:prstGeom prst="rect">
+            <a:avLst/>
+          </a:prstGeom>
+          <a:noFill/>
+        </p:spPr>
+        <p:txBody>
+          <a:bodyPr wrap="square">
+            <a:spAutoFit/>
+          </a:bodyPr>
+          <a:lstStyle/>
+          <a:p>
+            <a:pPr>
+              <a:spcBef>
+                <a:spcPts val="500"/>
+              </a:spcBef>
+            </a:pPr>
+            <a:r>
+              <a:rPr sz="1500">
+                <a:solidFill>
+                  <a:srgbClr val="003DA5"/>
+                </a:solidFill>
+                <a:latin typeface="Arial"/>
+              </a:rPr>
+              <a:t>▪  </a:t>
+            </a:r>
+            <a:r>
+              <a:rPr sz="1700" b="1">
+                <a:solidFill>
+                  <a:srgbClr val="003DA5"/>
+                </a:solidFill>
+                <a:latin typeface="Arial"/>
+              </a:rPr>
+              <a:t>Phase 5 – Vereinbarungen: </a:t>
+            </a:r>
+            <a:r>
+              <a:rPr sz="1700">
+                <a:solidFill>
+                  <a:srgbClr val="1A1A1A"/>
+                </a:solidFill>
+                <a:latin typeface="Arial"/>
+              </a:rPr>
+              <a:t>(ca. 15 Min.) - Erkenntnisse zusammenfassen, konkrete Maßnahmen mit Terminen festlegen</a:t>
             </a:r>
           </a:p>
         </p:txBody>
@@ -5294,7 +7308,7 @@
     <p:bg>
       <p:bgPr>
         <a:solidFill>
-          <a:srgbClr val="1A1A1A"/>
+          <a:srgbClr val="FFFFFF"/>
         </a:solidFill>
         <a:effectLst/>
       </p:bgPr>
@@ -5321,7 +7335,7 @@
             <a:avLst/>
           </a:prstGeom>
           <a:solidFill>
-            <a:srgbClr val="E05B00"/>
+            <a:srgbClr val="003DA5"/>
           </a:solidFill>
           <a:ln>
             <a:noFill/>
@@ -5357,8 +7371,8 @@
         </p:nvSpPr>
         <p:spPr>
           <a:xfrm>
-            <a:off x="365760" y="2286000"/>
-            <a:ext cx="11430000" cy="1828800"/>
+            <a:off x="228600" y="182880"/>
+            <a:ext cx="11430000" cy="320040"/>
           </a:xfrm>
           <a:prstGeom prst="rect">
             <a:avLst/>
@@ -5373,17 +7387,462 @@
           <a:p>
             <a:pPr algn="l"/>
             <a:r>
-              <a:rPr sz="3600" b="1">
-                <a:solidFill>
-                  <a:srgbClr val="FFFFFF"/>
-                </a:solidFill>
-                <a:latin typeface="Arial"/>
-              </a:rPr>
-              <a:t>Reflexionsfragen</a:t>
-            </a:r>
-          </a:p>
-        </p:txBody>
-      </p:sp>
+              <a:rPr sz="900" b="0" i="0">
+                <a:solidFill>
+                  <a:srgbClr val="556575"/>
+                </a:solidFill>
+                <a:latin typeface="Arial"/>
+              </a:rPr>
+              <a:t>M02 · Modulinhalte</a:t>
+            </a:r>
+          </a:p>
+        </p:txBody>
+      </p:sp>
+      <p:sp>
+        <p:nvSpPr>
+          <p:cNvPr id="4" name="TextBox 3"/>
+          <p:cNvSpPr txBox="1"/>
+          <p:nvPr/>
+        </p:nvSpPr>
+        <p:spPr>
+          <a:xfrm>
+            <a:off x="365760" y="274320"/>
+            <a:ext cx="11430000" cy="777240"/>
+          </a:xfrm>
+          <a:prstGeom prst="rect">
+            <a:avLst/>
+          </a:prstGeom>
+          <a:noFill/>
+        </p:spPr>
+        <p:txBody>
+          <a:bodyPr wrap="square">
+            <a:spAutoFit/>
+          </a:bodyPr>
+          <a:lstStyle/>
+          <a:p>
+            <a:pPr algn="l"/>
+            <a:r>
+              <a:rPr sz="2200" b="1" i="0">
+                <a:solidFill>
+                  <a:srgbClr val="003DA5"/>
+                </a:solidFill>
+                <a:latin typeface="Arial"/>
+              </a:rPr>
+              <a:t>Fragetechniken für den Analyse-Dialog</a:t>
+            </a:r>
+          </a:p>
+        </p:txBody>
+      </p:sp>
+      <p:sp>
+        <p:nvSpPr>
+          <p:cNvPr id="5" name="Rectangle 4"/>
+          <p:cNvSpPr/>
+          <p:nvPr/>
+        </p:nvSpPr>
+        <p:spPr>
+          <a:xfrm>
+            <a:off x="365760" y="1005840"/>
+            <a:ext cx="11430000" cy="27432"/>
+          </a:xfrm>
+          <a:prstGeom prst="rect">
+            <a:avLst/>
+          </a:prstGeom>
+          <a:solidFill>
+            <a:srgbClr val="D1D5DB"/>
+          </a:solidFill>
+          <a:ln>
+            <a:noFill/>
+          </a:ln>
+        </p:spPr>
+        <p:style>
+          <a:lnRef idx="1">
+            <a:schemeClr val="accent1"/>
+          </a:lnRef>
+          <a:fillRef idx="3">
+            <a:schemeClr val="accent1"/>
+          </a:fillRef>
+          <a:effectRef idx="2">
+            <a:schemeClr val="accent1"/>
+          </a:effectRef>
+          <a:fontRef idx="minor">
+            <a:schemeClr val="lt1"/>
+          </a:fontRef>
+        </p:style>
+        <p:txBody>
+          <a:bodyPr rtlCol="0" anchor="ctr"/>
+          <a:lstStyle/>
+          <a:p>
+            <a:pPr algn="ctr"/>
+          </a:p>
+        </p:txBody>
+      </p:sp>
+      <p:graphicFrame>
+        <p:nvGraphicFramePr>
+          <p:cNvPr id="6" name="Table 5"/>
+          <p:cNvGraphicFramePr>
+            <a:graphicFrameLocks noGrp="1"/>
+          </p:cNvGraphicFramePr>
+          <p:nvPr/>
+        </p:nvGraphicFramePr>
+        <p:xfrm>
+          <a:off x="365760" y="1143000"/>
+          <a:ext cx="11430000" cy="2377440"/>
+        </p:xfrm>
+        <a:graphic>
+          <a:graphicData uri="http://schemas.openxmlformats.org/drawingml/2006/table">
+            <a:tbl>
+              <a:tblPr firstRow="1" bandRow="1">
+                <a:tableStyleId>{5C22544A-7EE6-4342-B048-85BDC9FD1C3A}</a:tableStyleId>
+              </a:tblPr>
+              <a:tblGrid>
+                <a:gridCol w="3810000"/>
+                <a:gridCol w="3810000"/>
+                <a:gridCol w="3810000"/>
+              </a:tblGrid>
+              <a:tr h="475488">
+                <a:tc>
+                  <a:txBody>
+                    <a:bodyPr wrap="square"/>
+                    <a:lstStyle/>
+                    <a:p>
+                      <a:r>
+                        <a:rPr sz="1100" b="1">
+                          <a:solidFill>
+                            <a:srgbClr val="FFFFFF"/>
+                          </a:solidFill>
+                          <a:latin typeface="Arial"/>
+                        </a:rPr>
+                        <a:t>Fragetyp</a:t>
+                      </a:r>
+                    </a:p>
+                  </a:txBody>
+                  <a:tcPr>
+                    <a:solidFill>
+                      <a:srgbClr val="003DA5"/>
+                    </a:solidFill>
+                  </a:tcPr>
+                </a:tc>
+                <a:tc>
+                  <a:txBody>
+                    <a:bodyPr wrap="square"/>
+                    <a:lstStyle/>
+                    <a:p>
+                      <a:r>
+                        <a:rPr sz="1100" b="1">
+                          <a:solidFill>
+                            <a:srgbClr val="FFFFFF"/>
+                          </a:solidFill>
+                          <a:latin typeface="Arial"/>
+                        </a:rPr>
+                        <a:t>Ziel</a:t>
+                      </a:r>
+                    </a:p>
+                  </a:txBody>
+                  <a:tcPr>
+                    <a:solidFill>
+                      <a:srgbClr val="003DA5"/>
+                    </a:solidFill>
+                  </a:tcPr>
+                </a:tc>
+                <a:tc>
+                  <a:txBody>
+                    <a:bodyPr wrap="square"/>
+                    <a:lstStyle/>
+                    <a:p>
+                      <a:r>
+                        <a:rPr sz="1100" b="1">
+                          <a:solidFill>
+                            <a:srgbClr val="FFFFFF"/>
+                          </a:solidFill>
+                          <a:latin typeface="Arial"/>
+                        </a:rPr>
+                        <a:t>Beispiel</a:t>
+                      </a:r>
+                    </a:p>
+                  </a:txBody>
+                  <a:tcPr>
+                    <a:solidFill>
+                      <a:srgbClr val="003DA5"/>
+                    </a:solidFill>
+                  </a:tcPr>
+                </a:tc>
+              </a:tr>
+              <a:tr h="475488">
+                <a:tc>
+                  <a:txBody>
+                    <a:bodyPr wrap="square"/>
+                    <a:lstStyle/>
+                    <a:p>
+                      <a:r>
+                        <a:rPr sz="1100" b="0">
+                          <a:solidFill>
+                            <a:srgbClr val="1A1A1A"/>
+                          </a:solidFill>
+                          <a:latin typeface="Arial"/>
+                        </a:rPr>
+                        <a:t>Offene Explorationsfrage</a:t>
+                      </a:r>
+                    </a:p>
+                  </a:txBody>
+                  <a:tcPr>
+                    <a:solidFill>
+                      <a:srgbClr val="FFFFFF"/>
+                    </a:solidFill>
+                  </a:tcPr>
+                </a:tc>
+                <a:tc>
+                  <a:txBody>
+                    <a:bodyPr wrap="square"/>
+                    <a:lstStyle/>
+                    <a:p>
+                      <a:r>
+                        <a:rPr sz="1100" b="0">
+                          <a:solidFill>
+                            <a:srgbClr val="1A1A1A"/>
+                          </a:solidFill>
+                          <a:latin typeface="Arial"/>
+                        </a:rPr>
+                        <a:t>Kunden zum Erzählen bringen</a:t>
+                      </a:r>
+                    </a:p>
+                  </a:txBody>
+                  <a:tcPr>
+                    <a:solidFill>
+                      <a:srgbClr val="FFFFFF"/>
+                    </a:solidFill>
+                  </a:tcPr>
+                </a:tc>
+                <a:tc>
+                  <a:txBody>
+                    <a:bodyPr wrap="square"/>
+                    <a:lstStyle/>
+                    <a:p>
+                      <a:r>
+                        <a:rPr sz="1100" b="0">
+                          <a:solidFill>
+                            <a:srgbClr val="1A1A1A"/>
+                          </a:solidFill>
+                          <a:latin typeface="Arial"/>
+                        </a:rPr>
+                        <a:t>„Wie erklären Sie sich den Rückgang der Liquiditätsreserve?" — Niemals „Warum?" (wirkt anklagend). Stattdessen: „Welche Entscheidungen haben dazu geführt?" oder „Womit hängt das zusammen?"</a:t>
+                      </a:r>
+                    </a:p>
+                  </a:txBody>
+                  <a:tcPr>
+                    <a:solidFill>
+                      <a:srgbClr val="FFFFFF"/>
+                    </a:solidFill>
+                  </a:tcPr>
+                </a:tc>
+              </a:tr>
+              <a:tr h="475488">
+                <a:tc>
+                  <a:txBody>
+                    <a:bodyPr wrap="square"/>
+                    <a:lstStyle/>
+                    <a:p>
+                      <a:r>
+                        <a:rPr sz="1100" b="0">
+                          <a:solidFill>
+                            <a:srgbClr val="1A1A1A"/>
+                          </a:solidFill>
+                          <a:latin typeface="Arial"/>
+                        </a:rPr>
+                        <a:t>Spiegelnde Frage</a:t>
+                      </a:r>
+                    </a:p>
+                  </a:txBody>
+                  <a:tcPr>
+                    <a:solidFill>
+                      <a:srgbClr val="F4F6FA"/>
+                    </a:solidFill>
+                  </a:tcPr>
+                </a:tc>
+                <a:tc>
+                  <a:txBody>
+                    <a:bodyPr wrap="square"/>
+                    <a:lstStyle/>
+                    <a:p>
+                      <a:r>
+                        <a:rPr sz="1100" b="0">
+                          <a:solidFill>
+                            <a:srgbClr val="1A1A1A"/>
+                          </a:solidFill>
+                          <a:latin typeface="Arial"/>
+                        </a:rPr>
+                        <a:t>Verständnis klären</a:t>
+                      </a:r>
+                    </a:p>
+                  </a:txBody>
+                  <a:tcPr>
+                    <a:solidFill>
+                      <a:srgbClr val="F4F6FA"/>
+                    </a:solidFill>
+                  </a:tcPr>
+                </a:tc>
+                <a:tc>
+                  <a:txBody>
+                    <a:bodyPr wrap="square"/>
+                    <a:lstStyle/>
+                    <a:p>
+                      <a:r>
+                        <a:rPr sz="1100" b="0">
+                          <a:solidFill>
+                            <a:srgbClr val="1A1A1A"/>
+                          </a:solidFill>
+                          <a:latin typeface="Arial"/>
+                        </a:rPr>
+                        <a:t>„Wenn ich Sie richtig verstehe: Die Verschuldung ist temporär durch den Großauftrag?"</a:t>
+                      </a:r>
+                    </a:p>
+                  </a:txBody>
+                  <a:tcPr>
+                    <a:solidFill>
+                      <a:srgbClr val="F4F6FA"/>
+                    </a:solidFill>
+                  </a:tcPr>
+                </a:tc>
+              </a:tr>
+              <a:tr h="475488">
+                <a:tc>
+                  <a:txBody>
+                    <a:bodyPr wrap="square"/>
+                    <a:lstStyle/>
+                    <a:p>
+                      <a:r>
+                        <a:rPr sz="1100" b="0">
+                          <a:solidFill>
+                            <a:srgbClr val="1A1A1A"/>
+                          </a:solidFill>
+                          <a:latin typeface="Arial"/>
+                        </a:rPr>
+                        <a:t>Hypothetische Frage</a:t>
+                      </a:r>
+                    </a:p>
+                  </a:txBody>
+                  <a:tcPr>
+                    <a:solidFill>
+                      <a:srgbClr val="FFFFFF"/>
+                    </a:solidFill>
+                  </a:tcPr>
+                </a:tc>
+                <a:tc>
+                  <a:txBody>
+                    <a:bodyPr wrap="square"/>
+                    <a:lstStyle/>
+                    <a:p>
+                      <a:r>
+                        <a:rPr sz="1100" b="0">
+                          <a:solidFill>
+                            <a:srgbClr val="1A1A1A"/>
+                          </a:solidFill>
+                          <a:latin typeface="Arial"/>
+                        </a:rPr>
+                        <a:t>Zukünftige Szenarien erkunden</a:t>
+                      </a:r>
+                    </a:p>
+                  </a:txBody>
+                  <a:tcPr>
+                    <a:solidFill>
+                      <a:srgbClr val="FFFFFF"/>
+                    </a:solidFill>
+                  </a:tcPr>
+                </a:tc>
+                <a:tc>
+                  <a:txBody>
+                    <a:bodyPr wrap="square"/>
+                    <a:lstStyle/>
+                    <a:p>
+                      <a:r>
+                        <a:rPr sz="1100" b="0">
+                          <a:solidFill>
+                            <a:srgbClr val="1A1A1A"/>
+                          </a:solidFill>
+                          <a:latin typeface="Arial"/>
+                        </a:rPr>
+                        <a:t>„Was würde sich für Ihre Planung ändern, wenn die Zinsen weiter steigen?"</a:t>
+                      </a:r>
+                    </a:p>
+                  </a:txBody>
+                  <a:tcPr>
+                    <a:solidFill>
+                      <a:srgbClr val="FFFFFF"/>
+                    </a:solidFill>
+                  </a:tcPr>
+                </a:tc>
+              </a:tr>
+              <a:tr h="475488">
+                <a:tc>
+                  <a:txBody>
+                    <a:bodyPr wrap="square"/>
+                    <a:lstStyle/>
+                    <a:p>
+                      <a:r>
+                        <a:rPr sz="1100" b="0">
+                          <a:solidFill>
+                            <a:srgbClr val="1A1A1A"/>
+                          </a:solidFill>
+                          <a:latin typeface="Arial"/>
+                        </a:rPr>
+                        <a:t>Einwandaufgriff</a:t>
+                      </a:r>
+                    </a:p>
+                  </a:txBody>
+                  <a:tcPr>
+                    <a:solidFill>
+                      <a:srgbClr val="F4F6FA"/>
+                    </a:solidFill>
+                  </a:tcPr>
+                </a:tc>
+                <a:tc>
+                  <a:txBody>
+                    <a:bodyPr wrap="square"/>
+                    <a:lstStyle/>
+                    <a:p>
+                      <a:r>
+                        <a:rPr sz="1100" b="0">
+                          <a:solidFill>
+                            <a:srgbClr val="1A1A1A"/>
+                          </a:solidFill>
+                          <a:latin typeface="Arial"/>
+                        </a:rPr>
+                        <a:t>Defensivität auflösen</a:t>
+                      </a:r>
+                    </a:p>
+                  </a:txBody>
+                  <a:tcPr>
+                    <a:solidFill>
+                      <a:srgbClr val="F4F6FA"/>
+                    </a:solidFill>
+                  </a:tcPr>
+                </a:tc>
+                <a:tc>
+                  <a:txBody>
+                    <a:bodyPr wrap="square"/>
+                    <a:lstStyle/>
+                    <a:p>
+                      <a:r>
+                        <a:rPr sz="1100" b="0">
+                          <a:solidFill>
+                            <a:srgbClr val="1A1A1A"/>
+                          </a:solidFill>
+                          <a:latin typeface="Arial"/>
+                        </a:rPr>
+                        <a:t>Einwand anerkennen + Frage stellen (nie Gegenargument)</a:t>
+                      </a:r>
+                    </a:p>
+                  </a:txBody>
+                  <a:tcPr>
+                    <a:solidFill>
+                      <a:srgbClr val="F4F6FA"/>
+                    </a:solidFill>
+                  </a:tcPr>
+                </a:tc>
+              </a:tr>
+            </a:tbl>
+          </a:graphicData>
+        </a:graphic>
+      </p:graphicFrame>
     </p:spTree>
   </p:cSld>
   <p:clrMapOvr>
@@ -5461,8 +7920,8 @@
         </p:nvSpPr>
         <p:spPr>
           <a:xfrm>
-            <a:off x="365760" y="2286000"/>
-            <a:ext cx="11430000" cy="1828800"/>
+            <a:off x="365760" y="2011680"/>
+            <a:ext cx="11430000" cy="2011680"/>
           </a:xfrm>
           <a:prstGeom prst="rect">
             <a:avLst/>
@@ -5477,13 +7936,13 @@
           <a:p>
             <a:pPr algn="l"/>
             <a:r>
-              <a:rPr sz="3600" b="1">
+              <a:rPr sz="3600" b="1" i="0">
                 <a:solidFill>
                   <a:srgbClr val="FFFFFF"/>
                 </a:solidFill>
                 <a:latin typeface="Arial"/>
               </a:rPr>
-              <a:t>Transferaufgabe (4 Wochen nach dem Modul)</a:t>
+              <a:t>Praxiscase: Schwäbische Metallbau GmbH</a:t>
             </a:r>
           </a:p>
         </p:txBody>

--- a/public/downloads/praesentation/M02.pptx
+++ b/public/downloads/praesentation/M02.pptx
@@ -4152,7 +4152,7 @@
     <p:bg>
       <p:bgPr>
         <a:solidFill>
-          <a:srgbClr val="191D2E"/>
+          <a:srgbClr val="1F2B56"/>
         </a:solidFill>
         <a:effectLst/>
       </p:bgPr>
@@ -5374,7 +5374,7 @@
         <p:spPr>
           <a:xfrm>
             <a:off x="609600" y="920750"/>
-            <a:ext cx="10972800" cy="1778000"/>
+            <a:ext cx="4826000" cy="1778000"/>
           </a:xfrm>
           <a:prstGeom prst="rect">
             <a:avLst/>
@@ -5402,57 +5402,14 @@
       </p:sp>
       <p:sp>
         <p:nvSpPr>
-          <p:cNvPr id="7" name="Rectangle 6"/>
-          <p:cNvSpPr/>
-          <p:nvPr/>
-        </p:nvSpPr>
-        <p:spPr>
-          <a:xfrm>
-            <a:off x="609600" y="2762250"/>
-            <a:ext cx="10972800" cy="6350"/>
-          </a:xfrm>
-          <a:prstGeom prst="rect">
-            <a:avLst/>
-          </a:prstGeom>
-          <a:solidFill>
-            <a:srgbClr val="E0E0E8"/>
-          </a:solidFill>
-          <a:ln>
-            <a:noFill/>
-          </a:ln>
-        </p:spPr>
-        <p:style>
-          <a:lnRef idx="1">
-            <a:schemeClr val="accent1"/>
-          </a:lnRef>
-          <a:fillRef idx="3">
-            <a:schemeClr val="accent1"/>
-          </a:fillRef>
-          <a:effectRef idx="2">
-            <a:schemeClr val="accent1"/>
-          </a:effectRef>
-          <a:fontRef idx="minor">
-            <a:schemeClr val="lt1"/>
-          </a:fontRef>
-        </p:style>
-        <p:txBody>
-          <a:bodyPr rtlCol="0" anchor="ctr"/>
-          <a:lstStyle/>
-          <a:p>
-            <a:pPr algn="ctr"/>
-          </a:p>
-        </p:txBody>
-      </p:sp>
-      <p:sp>
-        <p:nvSpPr>
-          <p:cNvPr id="8" name="TextBox 7"/>
-          <p:cNvSpPr txBox="1"/>
-          <p:nvPr/>
-        </p:nvSpPr>
-        <p:spPr>
-          <a:xfrm>
-            <a:off x="609600" y="2876550"/>
-            <a:ext cx="254000" cy="355600"/>
+          <p:cNvPr id="7" name="TextBox 6"/>
+          <p:cNvSpPr txBox="1"/>
+          <p:nvPr/>
+        </p:nvSpPr>
+        <p:spPr>
+          <a:xfrm>
+            <a:off x="609600" y="2825750"/>
+            <a:ext cx="4826000" cy="1016000"/>
           </a:xfrm>
           <a:prstGeom prst="rect">
             <a:avLst/>
@@ -5467,95 +5424,718 @@
           <a:p>
             <a:pPr algn="l"/>
             <a:r>
-              <a:rPr sz="2200" b="0" i="0">
-                <a:solidFill>
-                  <a:srgbClr val="1F2B56"/>
+              <a:rPr sz="1400" b="0" i="0">
+                <a:solidFill>
+                  <a:srgbClr val="4D5270"/>
                 </a:solidFill>
                 <a:latin typeface="Georgia"/>
               </a:rPr>
-              <a:t>–</a:t>
-            </a:r>
-          </a:p>
-        </p:txBody>
-      </p:sp>
-      <p:sp>
-        <p:nvSpPr>
-          <p:cNvPr id="9" name="TextBox 8"/>
-          <p:cNvSpPr txBox="1"/>
-          <p:nvPr/>
-        </p:nvSpPr>
-        <p:spPr>
-          <a:xfrm>
-            <a:off x="939799" y="2851150"/>
-            <a:ext cx="10642600" cy="508000"/>
-          </a:xfrm>
-          <a:prstGeom prst="rect">
-            <a:avLst/>
-          </a:prstGeom>
-          <a:noFill/>
-        </p:spPr>
-        <p:txBody>
-          <a:bodyPr wrap="square">
-            <a:normAutofit/>
-          </a:bodyPr>
-          <a:lstStyle/>
-          <a:p>
-            <a:pPr algn="l"/>
-            <a:r>
-              <a:rPr sz="1400" b="0" i="0">
-                <a:solidFill>
-                  <a:srgbClr val="191D2E"/>
-                </a:solidFill>
-                <a:latin typeface="Georgia"/>
-              </a:rPr>
               <a:t>Auswertung: 4–5× Sicher/Souverän → Bereit für M03 | 2–3× → Auf dem richtigen Weg | 0–1× → Nächstes Gespräch mit bewusstem Fokus üben</a:t>
             </a:r>
           </a:p>
         </p:txBody>
       </p:sp>
-      <p:sp>
-        <p:nvSpPr>
-          <p:cNvPr id="10" name="Rectangle 9"/>
-          <p:cNvSpPr/>
-          <p:nvPr/>
-        </p:nvSpPr>
-        <p:spPr>
-          <a:xfrm>
-            <a:off x="939799" y="3333750"/>
-            <a:ext cx="10642600" cy="6350"/>
-          </a:xfrm>
-          <a:prstGeom prst="rect">
-            <a:avLst/>
-          </a:prstGeom>
-          <a:solidFill>
-            <a:srgbClr val="E0E0E8"/>
-          </a:solidFill>
-          <a:ln>
-            <a:noFill/>
-          </a:ln>
-        </p:spPr>
-        <p:style>
-          <a:lnRef idx="1">
-            <a:schemeClr val="accent1"/>
-          </a:lnRef>
-          <a:fillRef idx="3">
-            <a:schemeClr val="accent1"/>
-          </a:fillRef>
-          <a:effectRef idx="2">
-            <a:schemeClr val="accent1"/>
-          </a:effectRef>
-          <a:fontRef idx="minor">
-            <a:schemeClr val="lt1"/>
-          </a:fontRef>
-        </p:style>
-        <p:txBody>
-          <a:bodyPr rtlCol="0" anchor="ctr"/>
-          <a:lstStyle/>
-          <a:p>
-            <a:pPr algn="ctr"/>
-          </a:p>
-        </p:txBody>
-      </p:sp>
+      <p:graphicFrame>
+        <p:nvGraphicFramePr>
+          <p:cNvPr id="8" name="Table 7"/>
+          <p:cNvGraphicFramePr>
+            <a:graphicFrameLocks noGrp="1"/>
+          </p:cNvGraphicFramePr>
+          <p:nvPr/>
+        </p:nvGraphicFramePr>
+        <p:xfrm>
+          <a:off x="5715000" y="920750"/>
+          <a:ext cx="5867400" cy="2286000"/>
+        </p:xfrm>
+        <a:graphic>
+          <a:graphicData uri="http://schemas.openxmlformats.org/drawingml/2006/table">
+            <a:tbl>
+              <a:tblPr firstRow="1" bandRow="1">
+                <a:tableStyleId>{5C22544A-7EE6-4342-B048-85BDC9FD1C3A}</a:tableStyleId>
+              </a:tblPr>
+              <a:tblGrid>
+                <a:gridCol w="1173480"/>
+                <a:gridCol w="1173480"/>
+                <a:gridCol w="1173480"/>
+                <a:gridCol w="1173480"/>
+                <a:gridCol w="1173480"/>
+              </a:tblGrid>
+              <a:tr h="381000">
+                <a:tc>
+                  <a:txBody>
+                    <a:bodyPr wrap="square"/>
+                    <a:lstStyle/>
+                    <a:p>
+                      <a:r>
+                        <a:rPr sz="1000" b="1">
+                          <a:solidFill>
+                            <a:srgbClr val="F8F8FA"/>
+                          </a:solidFill>
+                          <a:latin typeface="Courier New"/>
+                        </a:rPr>
+                        <a:t>Kompetenz</a:t>
+                      </a:r>
+                    </a:p>
+                  </a:txBody>
+                  <a:tcPr>
+                    <a:solidFill>
+                      <a:srgbClr val="1F2B56"/>
+                    </a:solidFill>
+                  </a:tcPr>
+                </a:tc>
+                <a:tc>
+                  <a:txBody>
+                    <a:bodyPr wrap="square"/>
+                    <a:lstStyle/>
+                    <a:p>
+                      <a:r>
+                        <a:rPr sz="1000" b="1">
+                          <a:solidFill>
+                            <a:srgbClr val="F8F8FA"/>
+                          </a:solidFill>
+                          <a:latin typeface="Courier New"/>
+                        </a:rPr>
+                        <a:t>Noch unsicher</a:t>
+                      </a:r>
+                    </a:p>
+                  </a:txBody>
+                  <a:tcPr>
+                    <a:solidFill>
+                      <a:srgbClr val="1F2B56"/>
+                    </a:solidFill>
+                  </a:tcPr>
+                </a:tc>
+                <a:tc>
+                  <a:txBody>
+                    <a:bodyPr wrap="square"/>
+                    <a:lstStyle/>
+                    <a:p>
+                      <a:r>
+                        <a:rPr sz="1000" b="1">
+                          <a:solidFill>
+                            <a:srgbClr val="F8F8FA"/>
+                          </a:solidFill>
+                          <a:latin typeface="Courier New"/>
+                        </a:rPr>
+                        <a:t>Ansatzweise</a:t>
+                      </a:r>
+                    </a:p>
+                  </a:txBody>
+                  <a:tcPr>
+                    <a:solidFill>
+                      <a:srgbClr val="1F2B56"/>
+                    </a:solidFill>
+                  </a:tcPr>
+                </a:tc>
+                <a:tc>
+                  <a:txBody>
+                    <a:bodyPr wrap="square"/>
+                    <a:lstStyle/>
+                    <a:p>
+                      <a:r>
+                        <a:rPr sz="1000" b="1">
+                          <a:solidFill>
+                            <a:srgbClr val="F8F8FA"/>
+                          </a:solidFill>
+                          <a:latin typeface="Courier New"/>
+                        </a:rPr>
+                        <a:t>Sicher</a:t>
+                      </a:r>
+                    </a:p>
+                  </a:txBody>
+                  <a:tcPr>
+                    <a:solidFill>
+                      <a:srgbClr val="1F2B56"/>
+                    </a:solidFill>
+                  </a:tcPr>
+                </a:tc>
+                <a:tc>
+                  <a:txBody>
+                    <a:bodyPr wrap="square"/>
+                    <a:lstStyle/>
+                    <a:p>
+                      <a:r>
+                        <a:rPr sz="1000" b="1">
+                          <a:solidFill>
+                            <a:srgbClr val="F8F8FA"/>
+                          </a:solidFill>
+                          <a:latin typeface="Courier New"/>
+                        </a:rPr>
+                        <a:t>Souverän</a:t>
+                      </a:r>
+                    </a:p>
+                  </a:txBody>
+                  <a:tcPr>
+                    <a:solidFill>
+                      <a:srgbClr val="1F2B56"/>
+                    </a:solidFill>
+                  </a:tcPr>
+                </a:tc>
+              </a:tr>
+              <a:tr h="381000">
+                <a:tc>
+                  <a:txBody>
+                    <a:bodyPr wrap="square"/>
+                    <a:lstStyle/>
+                    <a:p>
+                      <a:r>
+                        <a:rPr sz="1000" b="0">
+                          <a:solidFill>
+                            <a:srgbClr val="191D2E"/>
+                          </a:solidFill>
+                          <a:latin typeface="Courier New"/>
+                        </a:rPr>
+                        <a:t>Bilanzgespräch mit 5-Phasen-Rahmen strukturieren</a:t>
+                      </a:r>
+                    </a:p>
+                  </a:txBody>
+                  <a:tcPr>
+                    <a:solidFill>
+                      <a:srgbClr val="F8F8FA"/>
+                    </a:solidFill>
+                  </a:tcPr>
+                </a:tc>
+                <a:tc>
+                  <a:txBody>
+                    <a:bodyPr wrap="square"/>
+                    <a:lstStyle/>
+                    <a:p>
+                      <a:r>
+                        <a:rPr sz="1000" b="0">
+                          <a:solidFill>
+                            <a:srgbClr val="191D2E"/>
+                          </a:solidFill>
+                          <a:latin typeface="Courier New"/>
+                        </a:rPr>
+                        <a:t>☐</a:t>
+                      </a:r>
+                    </a:p>
+                  </a:txBody>
+                  <a:tcPr>
+                    <a:solidFill>
+                      <a:srgbClr val="F8F8FA"/>
+                    </a:solidFill>
+                  </a:tcPr>
+                </a:tc>
+                <a:tc>
+                  <a:txBody>
+                    <a:bodyPr wrap="square"/>
+                    <a:lstStyle/>
+                    <a:p>
+                      <a:r>
+                        <a:rPr sz="1000" b="0">
+                          <a:solidFill>
+                            <a:srgbClr val="191D2E"/>
+                          </a:solidFill>
+                          <a:latin typeface="Courier New"/>
+                        </a:rPr>
+                        <a:t>☐</a:t>
+                      </a:r>
+                    </a:p>
+                  </a:txBody>
+                  <a:tcPr>
+                    <a:solidFill>
+                      <a:srgbClr val="F8F8FA"/>
+                    </a:solidFill>
+                  </a:tcPr>
+                </a:tc>
+                <a:tc>
+                  <a:txBody>
+                    <a:bodyPr wrap="square"/>
+                    <a:lstStyle/>
+                    <a:p>
+                      <a:r>
+                        <a:rPr sz="1000" b="0">
+                          <a:solidFill>
+                            <a:srgbClr val="191D2E"/>
+                          </a:solidFill>
+                          <a:latin typeface="Courier New"/>
+                        </a:rPr>
+                        <a:t>☐</a:t>
+                      </a:r>
+                    </a:p>
+                  </a:txBody>
+                  <a:tcPr>
+                    <a:solidFill>
+                      <a:srgbClr val="F8F8FA"/>
+                    </a:solidFill>
+                  </a:tcPr>
+                </a:tc>
+                <a:tc>
+                  <a:txBody>
+                    <a:bodyPr wrap="square"/>
+                    <a:lstStyle/>
+                    <a:p>
+                      <a:r>
+                        <a:rPr sz="1000" b="0">
+                          <a:solidFill>
+                            <a:srgbClr val="191D2E"/>
+                          </a:solidFill>
+                          <a:latin typeface="Courier New"/>
+                        </a:rPr>
+                        <a:t>☐</a:t>
+                      </a:r>
+                    </a:p>
+                  </a:txBody>
+                  <a:tcPr>
+                    <a:solidFill>
+                      <a:srgbClr val="F8F8FA"/>
+                    </a:solidFill>
+                  </a:tcPr>
+                </a:tc>
+              </a:tr>
+              <a:tr h="381000">
+                <a:tc>
+                  <a:txBody>
+                    <a:bodyPr wrap="square"/>
+                    <a:lstStyle/>
+                    <a:p>
+                      <a:r>
+                        <a:rPr sz="1000" b="0">
+                          <a:solidFill>
+                            <a:srgbClr val="191D2E"/>
+                          </a:solidFill>
+                          <a:latin typeface="Courier New"/>
+                        </a:rPr>
+                        <a:t>Kennzahlen mit offener Frage ansprechen (nicht urteilen)</a:t>
+                      </a:r>
+                    </a:p>
+                  </a:txBody>
+                  <a:tcPr>
+                    <a:solidFill>
+                      <a:srgbClr val="F0F0F5"/>
+                    </a:solidFill>
+                  </a:tcPr>
+                </a:tc>
+                <a:tc>
+                  <a:txBody>
+                    <a:bodyPr wrap="square"/>
+                    <a:lstStyle/>
+                    <a:p>
+                      <a:r>
+                        <a:rPr sz="1000" b="0">
+                          <a:solidFill>
+                            <a:srgbClr val="191D2E"/>
+                          </a:solidFill>
+                          <a:latin typeface="Courier New"/>
+                        </a:rPr>
+                        <a:t>☐</a:t>
+                      </a:r>
+                    </a:p>
+                  </a:txBody>
+                  <a:tcPr>
+                    <a:solidFill>
+                      <a:srgbClr val="F0F0F5"/>
+                    </a:solidFill>
+                  </a:tcPr>
+                </a:tc>
+                <a:tc>
+                  <a:txBody>
+                    <a:bodyPr wrap="square"/>
+                    <a:lstStyle/>
+                    <a:p>
+                      <a:r>
+                        <a:rPr sz="1000" b="0">
+                          <a:solidFill>
+                            <a:srgbClr val="191D2E"/>
+                          </a:solidFill>
+                          <a:latin typeface="Courier New"/>
+                        </a:rPr>
+                        <a:t>☐</a:t>
+                      </a:r>
+                    </a:p>
+                  </a:txBody>
+                  <a:tcPr>
+                    <a:solidFill>
+                      <a:srgbClr val="F0F0F5"/>
+                    </a:solidFill>
+                  </a:tcPr>
+                </a:tc>
+                <a:tc>
+                  <a:txBody>
+                    <a:bodyPr wrap="square"/>
+                    <a:lstStyle/>
+                    <a:p>
+                      <a:r>
+                        <a:rPr sz="1000" b="0">
+                          <a:solidFill>
+                            <a:srgbClr val="191D2E"/>
+                          </a:solidFill>
+                          <a:latin typeface="Courier New"/>
+                        </a:rPr>
+                        <a:t>☐</a:t>
+                      </a:r>
+                    </a:p>
+                  </a:txBody>
+                  <a:tcPr>
+                    <a:solidFill>
+                      <a:srgbClr val="F0F0F5"/>
+                    </a:solidFill>
+                  </a:tcPr>
+                </a:tc>
+                <a:tc>
+                  <a:txBody>
+                    <a:bodyPr wrap="square"/>
+                    <a:lstStyle/>
+                    <a:p>
+                      <a:r>
+                        <a:rPr sz="1000" b="0">
+                          <a:solidFill>
+                            <a:srgbClr val="191D2E"/>
+                          </a:solidFill>
+                          <a:latin typeface="Courier New"/>
+                        </a:rPr>
+                        <a:t>☐</a:t>
+                      </a:r>
+                    </a:p>
+                  </a:txBody>
+                  <a:tcPr>
+                    <a:solidFill>
+                      <a:srgbClr val="F0F0F5"/>
+                    </a:solidFill>
+                  </a:tcPr>
+                </a:tc>
+              </a:tr>
+              <a:tr h="381000">
+                <a:tc>
+                  <a:txBody>
+                    <a:bodyPr wrap="square"/>
+                    <a:lstStyle/>
+                    <a:p>
+                      <a:r>
+                        <a:rPr sz="1000" b="0">
+                          <a:solidFill>
+                            <a:srgbClr val="191D2E"/>
+                          </a:solidFill>
+                          <a:latin typeface="Courier New"/>
+                        </a:rPr>
+                        <a:t>Qualitative Faktoren aktiv erfragen</a:t>
+                      </a:r>
+                    </a:p>
+                  </a:txBody>
+                  <a:tcPr>
+                    <a:solidFill>
+                      <a:srgbClr val="F8F8FA"/>
+                    </a:solidFill>
+                  </a:tcPr>
+                </a:tc>
+                <a:tc>
+                  <a:txBody>
+                    <a:bodyPr wrap="square"/>
+                    <a:lstStyle/>
+                    <a:p>
+                      <a:r>
+                        <a:rPr sz="1000" b="0">
+                          <a:solidFill>
+                            <a:srgbClr val="191D2E"/>
+                          </a:solidFill>
+                          <a:latin typeface="Courier New"/>
+                        </a:rPr>
+                        <a:t>☐</a:t>
+                      </a:r>
+                    </a:p>
+                  </a:txBody>
+                  <a:tcPr>
+                    <a:solidFill>
+                      <a:srgbClr val="F8F8FA"/>
+                    </a:solidFill>
+                  </a:tcPr>
+                </a:tc>
+                <a:tc>
+                  <a:txBody>
+                    <a:bodyPr wrap="square"/>
+                    <a:lstStyle/>
+                    <a:p>
+                      <a:r>
+                        <a:rPr sz="1000" b="0">
+                          <a:solidFill>
+                            <a:srgbClr val="191D2E"/>
+                          </a:solidFill>
+                          <a:latin typeface="Courier New"/>
+                        </a:rPr>
+                        <a:t>☐</a:t>
+                      </a:r>
+                    </a:p>
+                  </a:txBody>
+                  <a:tcPr>
+                    <a:solidFill>
+                      <a:srgbClr val="F8F8FA"/>
+                    </a:solidFill>
+                  </a:tcPr>
+                </a:tc>
+                <a:tc>
+                  <a:txBody>
+                    <a:bodyPr wrap="square"/>
+                    <a:lstStyle/>
+                    <a:p>
+                      <a:r>
+                        <a:rPr sz="1000" b="0">
+                          <a:solidFill>
+                            <a:srgbClr val="191D2E"/>
+                          </a:solidFill>
+                          <a:latin typeface="Courier New"/>
+                        </a:rPr>
+                        <a:t>☐</a:t>
+                      </a:r>
+                    </a:p>
+                  </a:txBody>
+                  <a:tcPr>
+                    <a:solidFill>
+                      <a:srgbClr val="F8F8FA"/>
+                    </a:solidFill>
+                  </a:tcPr>
+                </a:tc>
+                <a:tc>
+                  <a:txBody>
+                    <a:bodyPr wrap="square"/>
+                    <a:lstStyle/>
+                    <a:p>
+                      <a:r>
+                        <a:rPr sz="1000" b="0">
+                          <a:solidFill>
+                            <a:srgbClr val="191D2E"/>
+                          </a:solidFill>
+                          <a:latin typeface="Courier New"/>
+                        </a:rPr>
+                        <a:t>☐</a:t>
+                      </a:r>
+                    </a:p>
+                  </a:txBody>
+                  <a:tcPr>
+                    <a:solidFill>
+                      <a:srgbClr val="F8F8FA"/>
+                    </a:solidFill>
+                  </a:tcPr>
+                </a:tc>
+              </a:tr>
+              <a:tr h="381000">
+                <a:tc>
+                  <a:txBody>
+                    <a:bodyPr wrap="square"/>
+                    <a:lstStyle/>
+                    <a:p>
+                      <a:r>
+                        <a:rPr sz="1000" b="0">
+                          <a:solidFill>
+                            <a:srgbClr val="191D2E"/>
+                          </a:solidFill>
+                          <a:latin typeface="Courier New"/>
+                        </a:rPr>
+                        <a:t>Einwände konstruktiv aufgreifen</a:t>
+                      </a:r>
+                    </a:p>
+                  </a:txBody>
+                  <a:tcPr>
+                    <a:solidFill>
+                      <a:srgbClr val="F0F0F5"/>
+                    </a:solidFill>
+                  </a:tcPr>
+                </a:tc>
+                <a:tc>
+                  <a:txBody>
+                    <a:bodyPr wrap="square"/>
+                    <a:lstStyle/>
+                    <a:p>
+                      <a:r>
+                        <a:rPr sz="1000" b="0">
+                          <a:solidFill>
+                            <a:srgbClr val="191D2E"/>
+                          </a:solidFill>
+                          <a:latin typeface="Courier New"/>
+                        </a:rPr>
+                        <a:t>☐</a:t>
+                      </a:r>
+                    </a:p>
+                  </a:txBody>
+                  <a:tcPr>
+                    <a:solidFill>
+                      <a:srgbClr val="F0F0F5"/>
+                    </a:solidFill>
+                  </a:tcPr>
+                </a:tc>
+                <a:tc>
+                  <a:txBody>
+                    <a:bodyPr wrap="square"/>
+                    <a:lstStyle/>
+                    <a:p>
+                      <a:r>
+                        <a:rPr sz="1000" b="0">
+                          <a:solidFill>
+                            <a:srgbClr val="191D2E"/>
+                          </a:solidFill>
+                          <a:latin typeface="Courier New"/>
+                        </a:rPr>
+                        <a:t>☐</a:t>
+                      </a:r>
+                    </a:p>
+                  </a:txBody>
+                  <a:tcPr>
+                    <a:solidFill>
+                      <a:srgbClr val="F0F0F5"/>
+                    </a:solidFill>
+                  </a:tcPr>
+                </a:tc>
+                <a:tc>
+                  <a:txBody>
+                    <a:bodyPr wrap="square"/>
+                    <a:lstStyle/>
+                    <a:p>
+                      <a:r>
+                        <a:rPr sz="1000" b="0">
+                          <a:solidFill>
+                            <a:srgbClr val="191D2E"/>
+                          </a:solidFill>
+                          <a:latin typeface="Courier New"/>
+                        </a:rPr>
+                        <a:t>☐</a:t>
+                      </a:r>
+                    </a:p>
+                  </a:txBody>
+                  <a:tcPr>
+                    <a:solidFill>
+                      <a:srgbClr val="F0F0F5"/>
+                    </a:solidFill>
+                  </a:tcPr>
+                </a:tc>
+                <a:tc>
+                  <a:txBody>
+                    <a:bodyPr wrap="square"/>
+                    <a:lstStyle/>
+                    <a:p>
+                      <a:r>
+                        <a:rPr sz="1000" b="0">
+                          <a:solidFill>
+                            <a:srgbClr val="191D2E"/>
+                          </a:solidFill>
+                          <a:latin typeface="Courier New"/>
+                        </a:rPr>
+                        <a:t>☐</a:t>
+                      </a:r>
+                    </a:p>
+                  </a:txBody>
+                  <a:tcPr>
+                    <a:solidFill>
+                      <a:srgbClr val="F0F0F5"/>
+                    </a:solidFill>
+                  </a:tcPr>
+                </a:tc>
+              </a:tr>
+              <a:tr h="381000">
+                <a:tc>
+                  <a:txBody>
+                    <a:bodyPr wrap="square"/>
+                    <a:lstStyle/>
+                    <a:p>
+                      <a:r>
+                        <a:rPr sz="1000" b="0">
+                          <a:solidFill>
+                            <a:srgbClr val="191D2E"/>
+                          </a:solidFill>
+                          <a:latin typeface="Courier New"/>
+                        </a:rPr>
+                        <a:t>Beratungsimpulse aus Analyse ableiten</a:t>
+                      </a:r>
+                    </a:p>
+                  </a:txBody>
+                  <a:tcPr>
+                    <a:solidFill>
+                      <a:srgbClr val="F8F8FA"/>
+                    </a:solidFill>
+                  </a:tcPr>
+                </a:tc>
+                <a:tc>
+                  <a:txBody>
+                    <a:bodyPr wrap="square"/>
+                    <a:lstStyle/>
+                    <a:p>
+                      <a:r>
+                        <a:rPr sz="1000" b="0">
+                          <a:solidFill>
+                            <a:srgbClr val="191D2E"/>
+                          </a:solidFill>
+                          <a:latin typeface="Courier New"/>
+                        </a:rPr>
+                        <a:t>☐</a:t>
+                      </a:r>
+                    </a:p>
+                  </a:txBody>
+                  <a:tcPr>
+                    <a:solidFill>
+                      <a:srgbClr val="F8F8FA"/>
+                    </a:solidFill>
+                  </a:tcPr>
+                </a:tc>
+                <a:tc>
+                  <a:txBody>
+                    <a:bodyPr wrap="square"/>
+                    <a:lstStyle/>
+                    <a:p>
+                      <a:r>
+                        <a:rPr sz="1000" b="0">
+                          <a:solidFill>
+                            <a:srgbClr val="191D2E"/>
+                          </a:solidFill>
+                          <a:latin typeface="Courier New"/>
+                        </a:rPr>
+                        <a:t>☐</a:t>
+                      </a:r>
+                    </a:p>
+                  </a:txBody>
+                  <a:tcPr>
+                    <a:solidFill>
+                      <a:srgbClr val="F8F8FA"/>
+                    </a:solidFill>
+                  </a:tcPr>
+                </a:tc>
+                <a:tc>
+                  <a:txBody>
+                    <a:bodyPr wrap="square"/>
+                    <a:lstStyle/>
+                    <a:p>
+                      <a:r>
+                        <a:rPr sz="1000" b="0">
+                          <a:solidFill>
+                            <a:srgbClr val="191D2E"/>
+                          </a:solidFill>
+                          <a:latin typeface="Courier New"/>
+                        </a:rPr>
+                        <a:t>☐</a:t>
+                      </a:r>
+                    </a:p>
+                  </a:txBody>
+                  <a:tcPr>
+                    <a:solidFill>
+                      <a:srgbClr val="F8F8FA"/>
+                    </a:solidFill>
+                  </a:tcPr>
+                </a:tc>
+                <a:tc>
+                  <a:txBody>
+                    <a:bodyPr wrap="square"/>
+                    <a:lstStyle/>
+                    <a:p>
+                      <a:r>
+                        <a:rPr sz="1000" b="0">
+                          <a:solidFill>
+                            <a:srgbClr val="191D2E"/>
+                          </a:solidFill>
+                          <a:latin typeface="Courier New"/>
+                        </a:rPr>
+                        <a:t>☐</a:t>
+                      </a:r>
+                    </a:p>
+                  </a:txBody>
+                  <a:tcPr>
+                    <a:solidFill>
+                      <a:srgbClr val="F8F8FA"/>
+                    </a:solidFill>
+                  </a:tcPr>
+                </a:tc>
+              </a:tr>
+            </a:tbl>
+          </a:graphicData>
+        </a:graphic>
+      </p:graphicFrame>
     </p:spTree>
   </p:cSld>
   <p:clrMapOvr>
@@ -6274,7 +6854,7 @@
     <p:bg>
       <p:bgPr>
         <a:solidFill>
-          <a:srgbClr val="191D2E"/>
+          <a:srgbClr val="1F2B56"/>
         </a:solidFill>
         <a:effectLst/>
       </p:bgPr>
@@ -7071,29 +7651,29 @@
         </p:nvSpPr>
         <p:spPr>
           <a:xfrm>
-            <a:off x="4064000" y="927100"/>
-            <a:ext cx="508000" cy="647700"/>
-          </a:xfrm>
-          <a:prstGeom prst="rect">
-            <a:avLst/>
-          </a:prstGeom>
-          <a:noFill/>
-        </p:spPr>
-        <p:txBody>
-          <a:bodyPr wrap="square">
+            <a:off x="4064000" y="939799"/>
+            <a:ext cx="762000" cy="647700"/>
+          </a:xfrm>
+          <a:prstGeom prst="rect">
+            <a:avLst/>
+          </a:prstGeom>
+          <a:noFill/>
+        </p:spPr>
+        <p:txBody>
+          <a:bodyPr wrap="none">
             <a:normAutofit/>
           </a:bodyPr>
           <a:lstStyle/>
           <a:p>
             <a:pPr algn="l"/>
             <a:r>
-              <a:rPr sz="2600" b="0" i="1">
+              <a:rPr sz="2400" b="0" i="1">
                 <a:solidFill>
                   <a:srgbClr val="1F2B56"/>
                 </a:solidFill>
                 <a:latin typeface="Georgia"/>
               </a:rPr>
-              <a:t>I.</a:t>
+              <a:t>I</a:t>
             </a:r>
           </a:p>
         </p:txBody>
@@ -7106,8 +7686,8 @@
         </p:nvSpPr>
         <p:spPr>
           <a:xfrm>
-            <a:off x="4699000" y="952500"/>
-            <a:ext cx="6858000" cy="622300"/>
+            <a:off x="4953000" y="952500"/>
+            <a:ext cx="6629400" cy="635000"/>
           </a:xfrm>
           <a:prstGeom prst="rect">
             <a:avLst/>
@@ -7141,7 +7721,7 @@
         </p:nvSpPr>
         <p:spPr>
           <a:xfrm>
-            <a:off x="4064000" y="1574800"/>
+            <a:off x="4064000" y="1587500"/>
             <a:ext cx="7518399" cy="6350"/>
           </a:xfrm>
           <a:prstGeom prst="rect">
@@ -7184,29 +7764,29 @@
         </p:nvSpPr>
         <p:spPr>
           <a:xfrm>
-            <a:off x="4064000" y="1612900"/>
-            <a:ext cx="508000" cy="647700"/>
-          </a:xfrm>
-          <a:prstGeom prst="rect">
-            <a:avLst/>
-          </a:prstGeom>
-          <a:noFill/>
-        </p:spPr>
-        <p:txBody>
-          <a:bodyPr wrap="square">
+            <a:off x="4064000" y="1638300"/>
+            <a:ext cx="762000" cy="647700"/>
+          </a:xfrm>
+          <a:prstGeom prst="rect">
+            <a:avLst/>
+          </a:prstGeom>
+          <a:noFill/>
+        </p:spPr>
+        <p:txBody>
+          <a:bodyPr wrap="none">
             <a:normAutofit/>
           </a:bodyPr>
           <a:lstStyle/>
           <a:p>
             <a:pPr algn="l"/>
             <a:r>
-              <a:rPr sz="2600" b="0" i="1">
+              <a:rPr sz="2400" b="0" i="1">
                 <a:solidFill>
                   <a:srgbClr val="1F2B56"/>
                 </a:solidFill>
                 <a:latin typeface="Georgia"/>
               </a:rPr>
-              <a:t>II.</a:t>
+              <a:t>II</a:t>
             </a:r>
           </a:p>
         </p:txBody>
@@ -7219,8 +7799,8 @@
         </p:nvSpPr>
         <p:spPr>
           <a:xfrm>
-            <a:off x="4699000" y="1638300"/>
-            <a:ext cx="6858000" cy="622300"/>
+            <a:off x="4953000" y="1651000"/>
+            <a:ext cx="6629400" cy="635000"/>
           </a:xfrm>
           <a:prstGeom prst="rect">
             <a:avLst/>
@@ -7254,7 +7834,7 @@
         </p:nvSpPr>
         <p:spPr>
           <a:xfrm>
-            <a:off x="4064000" y="2260600"/>
+            <a:off x="4064000" y="2286000"/>
             <a:ext cx="7518399" cy="6350"/>
           </a:xfrm>
           <a:prstGeom prst="rect">
@@ -7297,29 +7877,29 @@
         </p:nvSpPr>
         <p:spPr>
           <a:xfrm>
-            <a:off x="4064000" y="2298700"/>
-            <a:ext cx="508000" cy="647700"/>
-          </a:xfrm>
-          <a:prstGeom prst="rect">
-            <a:avLst/>
-          </a:prstGeom>
-          <a:noFill/>
-        </p:spPr>
-        <p:txBody>
-          <a:bodyPr wrap="square">
+            <a:off x="4064000" y="2336800"/>
+            <a:ext cx="762000" cy="647700"/>
+          </a:xfrm>
+          <a:prstGeom prst="rect">
+            <a:avLst/>
+          </a:prstGeom>
+          <a:noFill/>
+        </p:spPr>
+        <p:txBody>
+          <a:bodyPr wrap="none">
             <a:normAutofit/>
           </a:bodyPr>
           <a:lstStyle/>
           <a:p>
             <a:pPr algn="l"/>
             <a:r>
-              <a:rPr sz="2600" b="0" i="1">
+              <a:rPr sz="2400" b="0" i="1">
                 <a:solidFill>
                   <a:srgbClr val="1F2B56"/>
                 </a:solidFill>
                 <a:latin typeface="Georgia"/>
               </a:rPr>
-              <a:t>III.</a:t>
+              <a:t>III</a:t>
             </a:r>
           </a:p>
         </p:txBody>
@@ -7332,8 +7912,8 @@
         </p:nvSpPr>
         <p:spPr>
           <a:xfrm>
-            <a:off x="4699000" y="2324100"/>
-            <a:ext cx="6858000" cy="622300"/>
+            <a:off x="4953000" y="2349500"/>
+            <a:ext cx="6629400" cy="635000"/>
           </a:xfrm>
           <a:prstGeom prst="rect">
             <a:avLst/>
@@ -7367,7 +7947,7 @@
         </p:nvSpPr>
         <p:spPr>
           <a:xfrm>
-            <a:off x="4064000" y="2946400"/>
+            <a:off x="4064000" y="2984500"/>
             <a:ext cx="7518399" cy="6350"/>
           </a:xfrm>
           <a:prstGeom prst="rect">
@@ -7410,29 +7990,29 @@
         </p:nvSpPr>
         <p:spPr>
           <a:xfrm>
-            <a:off x="4064000" y="2984500"/>
-            <a:ext cx="508000" cy="647700"/>
-          </a:xfrm>
-          <a:prstGeom prst="rect">
-            <a:avLst/>
-          </a:prstGeom>
-          <a:noFill/>
-        </p:spPr>
-        <p:txBody>
-          <a:bodyPr wrap="square">
+            <a:off x="4064000" y="3035300"/>
+            <a:ext cx="762000" cy="647700"/>
+          </a:xfrm>
+          <a:prstGeom prst="rect">
+            <a:avLst/>
+          </a:prstGeom>
+          <a:noFill/>
+        </p:spPr>
+        <p:txBody>
+          <a:bodyPr wrap="none">
             <a:normAutofit/>
           </a:bodyPr>
           <a:lstStyle/>
           <a:p>
             <a:pPr algn="l"/>
             <a:r>
-              <a:rPr sz="2600" b="0" i="1">
+              <a:rPr sz="2400" b="0" i="1">
                 <a:solidFill>
                   <a:srgbClr val="1F2B56"/>
                 </a:solidFill>
                 <a:latin typeface="Georgia"/>
               </a:rPr>
-              <a:t>IV.</a:t>
+              <a:t>IV</a:t>
             </a:r>
           </a:p>
         </p:txBody>
@@ -7445,8 +8025,8 @@
         </p:nvSpPr>
         <p:spPr>
           <a:xfrm>
-            <a:off x="4699000" y="3009900"/>
-            <a:ext cx="6858000" cy="622300"/>
+            <a:off x="4953000" y="3048000"/>
+            <a:ext cx="6629400" cy="635000"/>
           </a:xfrm>
           <a:prstGeom prst="rect">
             <a:avLst/>
@@ -7480,7 +8060,7 @@
         </p:nvSpPr>
         <p:spPr>
           <a:xfrm>
-            <a:off x="4064000" y="3632200"/>
+            <a:off x="4064000" y="3683000"/>
             <a:ext cx="7518399" cy="6350"/>
           </a:xfrm>
           <a:prstGeom prst="rect">
@@ -7523,29 +8103,29 @@
         </p:nvSpPr>
         <p:spPr>
           <a:xfrm>
-            <a:off x="4064000" y="3670300"/>
-            <a:ext cx="508000" cy="647700"/>
-          </a:xfrm>
-          <a:prstGeom prst="rect">
-            <a:avLst/>
-          </a:prstGeom>
-          <a:noFill/>
-        </p:spPr>
-        <p:txBody>
-          <a:bodyPr wrap="square">
+            <a:off x="4064000" y="3733799"/>
+            <a:ext cx="762000" cy="647700"/>
+          </a:xfrm>
+          <a:prstGeom prst="rect">
+            <a:avLst/>
+          </a:prstGeom>
+          <a:noFill/>
+        </p:spPr>
+        <p:txBody>
+          <a:bodyPr wrap="none">
             <a:normAutofit/>
           </a:bodyPr>
           <a:lstStyle/>
           <a:p>
             <a:pPr algn="l"/>
             <a:r>
-              <a:rPr sz="2600" b="0" i="1">
+              <a:rPr sz="2400" b="0" i="1">
                 <a:solidFill>
                   <a:srgbClr val="1F2B56"/>
                 </a:solidFill>
                 <a:latin typeface="Georgia"/>
               </a:rPr>
-              <a:t>V.</a:t>
+              <a:t>V</a:t>
             </a:r>
           </a:p>
         </p:txBody>
@@ -7558,8 +8138,8 @@
         </p:nvSpPr>
         <p:spPr>
           <a:xfrm>
-            <a:off x="4699000" y="3695700"/>
-            <a:ext cx="6858000" cy="622300"/>
+            <a:off x="4953000" y="3746500"/>
+            <a:ext cx="6629400" cy="635000"/>
           </a:xfrm>
           <a:prstGeom prst="rect">
             <a:avLst/>
@@ -7599,7 +8179,7 @@
     <p:bg>
       <p:bgPr>
         <a:solidFill>
-          <a:srgbClr val="191D2E"/>
+          <a:srgbClr val="1F2B56"/>
         </a:solidFill>
         <a:effectLst/>
       </p:bgPr>
@@ -8107,7 +8687,7 @@
                   </a:txBody>
                   <a:tcPr>
                     <a:solidFill>
-                      <a:srgbClr val="191D2E"/>
+                      <a:srgbClr val="1F2B56"/>
                     </a:solidFill>
                   </a:tcPr>
                 </a:tc>
@@ -8129,7 +8709,7 @@
                   </a:txBody>
                   <a:tcPr>
                     <a:solidFill>
-                      <a:srgbClr val="191D2E"/>
+                      <a:srgbClr val="1F2B56"/>
                     </a:solidFill>
                   </a:tcPr>
                 </a:tc>
@@ -8151,7 +8731,7 @@
                   </a:txBody>
                   <a:tcPr>
                     <a:solidFill>
-                      <a:srgbClr val="191D2E"/>
+                      <a:srgbClr val="1F2B56"/>
                     </a:solidFill>
                   </a:tcPr>
                 </a:tc>
@@ -10990,7 +11570,7 @@
                   </a:txBody>
                   <a:tcPr>
                     <a:solidFill>
-                      <a:srgbClr val="191D2E"/>
+                      <a:srgbClr val="1F2B56"/>
                     </a:solidFill>
                   </a:tcPr>
                 </a:tc>
@@ -11012,7 +11592,7 @@
                   </a:txBody>
                   <a:tcPr>
                     <a:solidFill>
-                      <a:srgbClr val="191D2E"/>
+                      <a:srgbClr val="1F2B56"/>
                     </a:solidFill>
                   </a:tcPr>
                 </a:tc>
@@ -11034,7 +11614,7 @@
                   </a:txBody>
                   <a:tcPr>
                     <a:solidFill>
-                      <a:srgbClr val="191D2E"/>
+                      <a:srgbClr val="1F2B56"/>
                     </a:solidFill>
                   </a:tcPr>
                 </a:tc>
@@ -11056,7 +11636,7 @@
                   </a:txBody>
                   <a:tcPr>
                     <a:solidFill>
-                      <a:srgbClr val="191D2E"/>
+                      <a:srgbClr val="1F2B56"/>
                     </a:solidFill>
                   </a:tcPr>
                 </a:tc>
